--- a/Final/Figures/gray.pptx
+++ b/Final/Figures/gray.pptx
@@ -2,12 +2,12 @@
 <file path=ppt/presentation.xml><?xml version="1.0" encoding="utf-8"?>
 <p:presentation xmlns:a="http://schemas.openxmlformats.org/drawingml/2006/main" xmlns:r="http://schemas.openxmlformats.org/officeDocument/2006/relationships" xmlns:p="http://schemas.openxmlformats.org/presentationml/2006/main" saveSubsetFonts="1">
   <p:sldMasterIdLst>
-    <p:sldMasterId id="2147483684" r:id="rId1"/>
+    <p:sldMasterId id="2147483720" r:id="rId1"/>
   </p:sldMasterIdLst>
   <p:sldIdLst>
     <p:sldId id="256" r:id="rId2"/>
   </p:sldIdLst>
-  <p:sldSz cx="10799763" cy="2879725"/>
+  <p:sldSz cx="9906000" cy="2519363"/>
   <p:notesSz cx="6858000" cy="9144000"/>
   <p:defaultTextStyle>
     <a:defPPr>
@@ -141,15 +141,15 @@
         </p:nvSpPr>
         <p:spPr>
           <a:xfrm>
-            <a:off x="1349971" y="471289"/>
-            <a:ext cx="8099822" cy="1002571"/>
+            <a:off x="1238250" y="412312"/>
+            <a:ext cx="7429500" cy="877112"/>
           </a:xfrm>
         </p:spPr>
         <p:txBody>
           <a:bodyPr anchor="b"/>
           <a:lstStyle>
             <a:lvl1pPr algn="ctr">
-              <a:defRPr sz="2519"/>
+              <a:defRPr sz="2204"/>
             </a:lvl1pPr>
           </a:lstStyle>
           <a:p>
@@ -173,8 +173,8 @@
         </p:nvSpPr>
         <p:spPr>
           <a:xfrm>
-            <a:off x="1349971" y="1512522"/>
-            <a:ext cx="8099822" cy="695267"/>
+            <a:off x="1238250" y="1323249"/>
+            <a:ext cx="7429500" cy="608263"/>
           </a:xfrm>
         </p:spPr>
         <p:txBody>
@@ -182,39 +182,39 @@
           <a:lstStyle>
             <a:lvl1pPr marL="0" indent="0" algn="ctr">
               <a:buNone/>
-              <a:defRPr sz="1008"/>
+              <a:defRPr sz="882"/>
             </a:lvl1pPr>
-            <a:lvl2pPr marL="191978" indent="0" algn="ctr">
-              <a:buNone/>
-              <a:defRPr sz="840"/>
+            <a:lvl2pPr marL="167975" indent="0" algn="ctr">
+              <a:buNone/>
+              <a:defRPr sz="735"/>
             </a:lvl2pPr>
-            <a:lvl3pPr marL="383957" indent="0" algn="ctr">
-              <a:buNone/>
-              <a:defRPr sz="756"/>
+            <a:lvl3pPr marL="335951" indent="0" algn="ctr">
+              <a:buNone/>
+              <a:defRPr sz="661"/>
             </a:lvl3pPr>
-            <a:lvl4pPr marL="575935" indent="0" algn="ctr">
-              <a:buNone/>
-              <a:defRPr sz="672"/>
+            <a:lvl4pPr marL="503926" indent="0" algn="ctr">
+              <a:buNone/>
+              <a:defRPr sz="588"/>
             </a:lvl4pPr>
-            <a:lvl5pPr marL="767913" indent="0" algn="ctr">
-              <a:buNone/>
-              <a:defRPr sz="672"/>
+            <a:lvl5pPr marL="671901" indent="0" algn="ctr">
+              <a:buNone/>
+              <a:defRPr sz="588"/>
             </a:lvl5pPr>
-            <a:lvl6pPr marL="959891" indent="0" algn="ctr">
-              <a:buNone/>
-              <a:defRPr sz="672"/>
+            <a:lvl6pPr marL="839876" indent="0" algn="ctr">
+              <a:buNone/>
+              <a:defRPr sz="588"/>
             </a:lvl6pPr>
-            <a:lvl7pPr marL="1151870" indent="0" algn="ctr">
-              <a:buNone/>
-              <a:defRPr sz="672"/>
+            <a:lvl7pPr marL="1007852" indent="0" algn="ctr">
+              <a:buNone/>
+              <a:defRPr sz="588"/>
             </a:lvl7pPr>
-            <a:lvl8pPr marL="1343848" indent="0" algn="ctr">
-              <a:buNone/>
-              <a:defRPr sz="672"/>
+            <a:lvl8pPr marL="1175827" indent="0" algn="ctr">
+              <a:buNone/>
+              <a:defRPr sz="588"/>
             </a:lvl8pPr>
-            <a:lvl9pPr marL="1535826" indent="0" algn="ctr">
-              <a:buNone/>
-              <a:defRPr sz="672"/>
+            <a:lvl9pPr marL="1343802" indent="0" algn="ctr">
+              <a:buNone/>
+              <a:defRPr sz="588"/>
             </a:lvl9pPr>
           </a:lstStyle>
           <a:p>
@@ -243,7 +243,7 @@
           <a:p>
             <a:fld id="{40ACB8D9-02A8-431F-86FB-1060DDC6D7B5}" type="datetimeFigureOut">
               <a:rPr lang="zh-TW" altLang="en-US" smtClean="0"/>
-              <a:t>2026/4/20</a:t>
+              <a:t>2026/5/20</a:t>
             </a:fld>
             <a:endParaRPr lang="zh-TW" altLang="en-US"/>
           </a:p>
@@ -294,7 +294,7 @@
     </p:spTree>
     <p:extLst>
       <p:ext uri="{BB962C8B-B14F-4D97-AF65-F5344CB8AC3E}">
-        <p14:creationId xmlns:p14="http://schemas.microsoft.com/office/powerpoint/2010/main" val="2748968820"/>
+        <p14:creationId xmlns:p14="http://schemas.microsoft.com/office/powerpoint/2010/main" val="1850949561"/>
       </p:ext>
     </p:extLst>
   </p:cSld>
@@ -413,7 +413,7 @@
           <a:p>
             <a:fld id="{40ACB8D9-02A8-431F-86FB-1060DDC6D7B5}" type="datetimeFigureOut">
               <a:rPr lang="zh-TW" altLang="en-US" smtClean="0"/>
-              <a:t>2026/4/20</a:t>
+              <a:t>2026/5/20</a:t>
             </a:fld>
             <a:endParaRPr lang="zh-TW" altLang="en-US"/>
           </a:p>
@@ -464,7 +464,7 @@
     </p:spTree>
     <p:extLst>
       <p:ext uri="{BB962C8B-B14F-4D97-AF65-F5344CB8AC3E}">
-        <p14:creationId xmlns:p14="http://schemas.microsoft.com/office/powerpoint/2010/main" val="2416500384"/>
+        <p14:creationId xmlns:p14="http://schemas.microsoft.com/office/powerpoint/2010/main" val="4086770799"/>
       </p:ext>
     </p:extLst>
   </p:cSld>
@@ -503,8 +503,8 @@
         </p:nvSpPr>
         <p:spPr>
           <a:xfrm>
-            <a:off x="7728580" y="153319"/>
-            <a:ext cx="2328699" cy="2440434"/>
+            <a:off x="7088981" y="134133"/>
+            <a:ext cx="2135981" cy="2135044"/>
           </a:xfrm>
         </p:spPr>
         <p:txBody>
@@ -531,8 +531,8 @@
         </p:nvSpPr>
         <p:spPr>
           <a:xfrm>
-            <a:off x="742484" y="153319"/>
-            <a:ext cx="6851100" cy="2440434"/>
+            <a:off x="681037" y="134133"/>
+            <a:ext cx="6284119" cy="2135044"/>
           </a:xfrm>
         </p:spPr>
         <p:txBody>
@@ -593,7 +593,7 @@
           <a:p>
             <a:fld id="{40ACB8D9-02A8-431F-86FB-1060DDC6D7B5}" type="datetimeFigureOut">
               <a:rPr lang="zh-TW" altLang="en-US" smtClean="0"/>
-              <a:t>2026/4/20</a:t>
+              <a:t>2026/5/20</a:t>
             </a:fld>
             <a:endParaRPr lang="zh-TW" altLang="en-US"/>
           </a:p>
@@ -644,7 +644,7 @@
     </p:spTree>
     <p:extLst>
       <p:ext uri="{BB962C8B-B14F-4D97-AF65-F5344CB8AC3E}">
-        <p14:creationId xmlns:p14="http://schemas.microsoft.com/office/powerpoint/2010/main" val="4012556516"/>
+        <p14:creationId xmlns:p14="http://schemas.microsoft.com/office/powerpoint/2010/main" val="466377139"/>
       </p:ext>
     </p:extLst>
   </p:cSld>
@@ -763,7 +763,7 @@
           <a:p>
             <a:fld id="{40ACB8D9-02A8-431F-86FB-1060DDC6D7B5}" type="datetimeFigureOut">
               <a:rPr lang="zh-TW" altLang="en-US" smtClean="0"/>
-              <a:t>2026/4/20</a:t>
+              <a:t>2026/5/20</a:t>
             </a:fld>
             <a:endParaRPr lang="zh-TW" altLang="en-US"/>
           </a:p>
@@ -814,7 +814,7 @@
     </p:spTree>
     <p:extLst>
       <p:ext uri="{BB962C8B-B14F-4D97-AF65-F5344CB8AC3E}">
-        <p14:creationId xmlns:p14="http://schemas.microsoft.com/office/powerpoint/2010/main" val="1116950301"/>
+        <p14:creationId xmlns:p14="http://schemas.microsoft.com/office/powerpoint/2010/main" val="1759016598"/>
       </p:ext>
     </p:extLst>
   </p:cSld>
@@ -853,15 +853,15 @@
         </p:nvSpPr>
         <p:spPr>
           <a:xfrm>
-            <a:off x="736859" y="717932"/>
-            <a:ext cx="9314796" cy="1197885"/>
+            <a:off x="675878" y="628091"/>
+            <a:ext cx="8543925" cy="1047985"/>
           </a:xfrm>
         </p:spPr>
         <p:txBody>
           <a:bodyPr anchor="b"/>
           <a:lstStyle>
             <a:lvl1pPr>
-              <a:defRPr sz="2519"/>
+              <a:defRPr sz="2204"/>
             </a:lvl1pPr>
           </a:lstStyle>
           <a:p>
@@ -885,8 +885,8 @@
         </p:nvSpPr>
         <p:spPr>
           <a:xfrm>
-            <a:off x="736859" y="1927150"/>
-            <a:ext cx="9314796" cy="629940"/>
+            <a:off x="675878" y="1685991"/>
+            <a:ext cx="8543925" cy="551110"/>
           </a:xfrm>
         </p:spPr>
         <p:txBody>
@@ -894,7 +894,7 @@
           <a:lstStyle>
             <a:lvl1pPr marL="0" indent="0">
               <a:buNone/>
-              <a:defRPr sz="1008">
+              <a:defRPr sz="882">
                 <a:solidFill>
                   <a:schemeClr val="tx1">
                     <a:tint val="75000"/>
@@ -902,9 +902,9 @@
                 </a:solidFill>
               </a:defRPr>
             </a:lvl1pPr>
-            <a:lvl2pPr marL="191978" indent="0">
-              <a:buNone/>
-              <a:defRPr sz="840">
+            <a:lvl2pPr marL="167975" indent="0">
+              <a:buNone/>
+              <a:defRPr sz="735">
                 <a:solidFill>
                   <a:schemeClr val="tx1">
                     <a:tint val="75000"/>
@@ -912,9 +912,9 @@
                 </a:solidFill>
               </a:defRPr>
             </a:lvl2pPr>
-            <a:lvl3pPr marL="383957" indent="0">
-              <a:buNone/>
-              <a:defRPr sz="756">
+            <a:lvl3pPr marL="335951" indent="0">
+              <a:buNone/>
+              <a:defRPr sz="661">
                 <a:solidFill>
                   <a:schemeClr val="tx1">
                     <a:tint val="75000"/>
@@ -922,9 +922,9 @@
                 </a:solidFill>
               </a:defRPr>
             </a:lvl3pPr>
-            <a:lvl4pPr marL="575935" indent="0">
-              <a:buNone/>
-              <a:defRPr sz="672">
+            <a:lvl4pPr marL="503926" indent="0">
+              <a:buNone/>
+              <a:defRPr sz="588">
                 <a:solidFill>
                   <a:schemeClr val="tx1">
                     <a:tint val="75000"/>
@@ -932,9 +932,9 @@
                 </a:solidFill>
               </a:defRPr>
             </a:lvl4pPr>
-            <a:lvl5pPr marL="767913" indent="0">
-              <a:buNone/>
-              <a:defRPr sz="672">
+            <a:lvl5pPr marL="671901" indent="0">
+              <a:buNone/>
+              <a:defRPr sz="588">
                 <a:solidFill>
                   <a:schemeClr val="tx1">
                     <a:tint val="75000"/>
@@ -942,9 +942,9 @@
                 </a:solidFill>
               </a:defRPr>
             </a:lvl5pPr>
-            <a:lvl6pPr marL="959891" indent="0">
-              <a:buNone/>
-              <a:defRPr sz="672">
+            <a:lvl6pPr marL="839876" indent="0">
+              <a:buNone/>
+              <a:defRPr sz="588">
                 <a:solidFill>
                   <a:schemeClr val="tx1">
                     <a:tint val="75000"/>
@@ -952,9 +952,9 @@
                 </a:solidFill>
               </a:defRPr>
             </a:lvl6pPr>
-            <a:lvl7pPr marL="1151870" indent="0">
-              <a:buNone/>
-              <a:defRPr sz="672">
+            <a:lvl7pPr marL="1007852" indent="0">
+              <a:buNone/>
+              <a:defRPr sz="588">
                 <a:solidFill>
                   <a:schemeClr val="tx1">
                     <a:tint val="75000"/>
@@ -962,9 +962,9 @@
                 </a:solidFill>
               </a:defRPr>
             </a:lvl7pPr>
-            <a:lvl8pPr marL="1343848" indent="0">
-              <a:buNone/>
-              <a:defRPr sz="672">
+            <a:lvl8pPr marL="1175827" indent="0">
+              <a:buNone/>
+              <a:defRPr sz="588">
                 <a:solidFill>
                   <a:schemeClr val="tx1">
                     <a:tint val="75000"/>
@@ -972,9 +972,9 @@
                 </a:solidFill>
               </a:defRPr>
             </a:lvl8pPr>
-            <a:lvl9pPr marL="1535826" indent="0">
-              <a:buNone/>
-              <a:defRPr sz="672">
+            <a:lvl9pPr marL="1343802" indent="0">
+              <a:buNone/>
+              <a:defRPr sz="588">
                 <a:solidFill>
                   <a:schemeClr val="tx1">
                     <a:tint val="75000"/>
@@ -1009,7 +1009,7 @@
           <a:p>
             <a:fld id="{40ACB8D9-02A8-431F-86FB-1060DDC6D7B5}" type="datetimeFigureOut">
               <a:rPr lang="zh-TW" altLang="en-US" smtClean="0"/>
-              <a:t>2026/4/20</a:t>
+              <a:t>2026/5/20</a:t>
             </a:fld>
             <a:endParaRPr lang="zh-TW" altLang="en-US"/>
           </a:p>
@@ -1060,7 +1060,7 @@
     </p:spTree>
     <p:extLst>
       <p:ext uri="{BB962C8B-B14F-4D97-AF65-F5344CB8AC3E}">
-        <p14:creationId xmlns:p14="http://schemas.microsoft.com/office/powerpoint/2010/main" val="4018118247"/>
+        <p14:creationId xmlns:p14="http://schemas.microsoft.com/office/powerpoint/2010/main" val="1415250496"/>
       </p:ext>
     </p:extLst>
   </p:cSld>
@@ -1122,8 +1122,8 @@
         </p:nvSpPr>
         <p:spPr>
           <a:xfrm>
-            <a:off x="742484" y="766593"/>
-            <a:ext cx="4589899" cy="1827159"/>
+            <a:off x="681038" y="670664"/>
+            <a:ext cx="4210050" cy="1598513"/>
           </a:xfrm>
         </p:spPr>
         <p:txBody>
@@ -1179,8 +1179,8 @@
         </p:nvSpPr>
         <p:spPr>
           <a:xfrm>
-            <a:off x="5467380" y="766593"/>
-            <a:ext cx="4589899" cy="1827159"/>
+            <a:off x="5014913" y="670664"/>
+            <a:ext cx="4210050" cy="1598513"/>
           </a:xfrm>
         </p:spPr>
         <p:txBody>
@@ -1241,7 +1241,7 @@
           <a:p>
             <a:fld id="{40ACB8D9-02A8-431F-86FB-1060DDC6D7B5}" type="datetimeFigureOut">
               <a:rPr lang="zh-TW" altLang="en-US" smtClean="0"/>
-              <a:t>2026/4/20</a:t>
+              <a:t>2026/5/20</a:t>
             </a:fld>
             <a:endParaRPr lang="zh-TW" altLang="en-US"/>
           </a:p>
@@ -1292,7 +1292,7 @@
     </p:spTree>
     <p:extLst>
       <p:ext uri="{BB962C8B-B14F-4D97-AF65-F5344CB8AC3E}">
-        <p14:creationId xmlns:p14="http://schemas.microsoft.com/office/powerpoint/2010/main" val="1405214775"/>
+        <p14:creationId xmlns:p14="http://schemas.microsoft.com/office/powerpoint/2010/main" val="757721644"/>
       </p:ext>
     </p:extLst>
   </p:cSld>
@@ -1331,8 +1331,8 @@
         </p:nvSpPr>
         <p:spPr>
           <a:xfrm>
-            <a:off x="743890" y="153319"/>
-            <a:ext cx="9314796" cy="556614"/>
+            <a:off x="682328" y="134133"/>
+            <a:ext cx="8543925" cy="486960"/>
           </a:xfrm>
         </p:spPr>
         <p:txBody>
@@ -1359,8 +1359,8 @@
         </p:nvSpPr>
         <p:spPr>
           <a:xfrm>
-            <a:off x="743891" y="705933"/>
-            <a:ext cx="4568806" cy="345967"/>
+            <a:off x="682328" y="617594"/>
+            <a:ext cx="4190702" cy="302673"/>
           </a:xfrm>
         </p:spPr>
         <p:txBody>
@@ -1368,39 +1368,39 @@
           <a:lstStyle>
             <a:lvl1pPr marL="0" indent="0">
               <a:buNone/>
-              <a:defRPr sz="1008" b="1"/>
+              <a:defRPr sz="882" b="1"/>
             </a:lvl1pPr>
-            <a:lvl2pPr marL="191978" indent="0">
-              <a:buNone/>
-              <a:defRPr sz="840" b="1"/>
+            <a:lvl2pPr marL="167975" indent="0">
+              <a:buNone/>
+              <a:defRPr sz="735" b="1"/>
             </a:lvl2pPr>
-            <a:lvl3pPr marL="383957" indent="0">
-              <a:buNone/>
-              <a:defRPr sz="756" b="1"/>
+            <a:lvl3pPr marL="335951" indent="0">
+              <a:buNone/>
+              <a:defRPr sz="661" b="1"/>
             </a:lvl3pPr>
-            <a:lvl4pPr marL="575935" indent="0">
-              <a:buNone/>
-              <a:defRPr sz="672" b="1"/>
+            <a:lvl4pPr marL="503926" indent="0">
+              <a:buNone/>
+              <a:defRPr sz="588" b="1"/>
             </a:lvl4pPr>
-            <a:lvl5pPr marL="767913" indent="0">
-              <a:buNone/>
-              <a:defRPr sz="672" b="1"/>
+            <a:lvl5pPr marL="671901" indent="0">
+              <a:buNone/>
+              <a:defRPr sz="588" b="1"/>
             </a:lvl5pPr>
-            <a:lvl6pPr marL="959891" indent="0">
-              <a:buNone/>
-              <a:defRPr sz="672" b="1"/>
+            <a:lvl6pPr marL="839876" indent="0">
+              <a:buNone/>
+              <a:defRPr sz="588" b="1"/>
             </a:lvl6pPr>
-            <a:lvl7pPr marL="1151870" indent="0">
-              <a:buNone/>
-              <a:defRPr sz="672" b="1"/>
+            <a:lvl7pPr marL="1007852" indent="0">
+              <a:buNone/>
+              <a:defRPr sz="588" b="1"/>
             </a:lvl7pPr>
-            <a:lvl8pPr marL="1343848" indent="0">
-              <a:buNone/>
-              <a:defRPr sz="672" b="1"/>
+            <a:lvl8pPr marL="1175827" indent="0">
+              <a:buNone/>
+              <a:defRPr sz="588" b="1"/>
             </a:lvl8pPr>
-            <a:lvl9pPr marL="1535826" indent="0">
-              <a:buNone/>
-              <a:defRPr sz="672" b="1"/>
+            <a:lvl9pPr marL="1343802" indent="0">
+              <a:buNone/>
+              <a:defRPr sz="588" b="1"/>
             </a:lvl9pPr>
           </a:lstStyle>
           <a:p>
@@ -1424,8 +1424,8 @@
         </p:nvSpPr>
         <p:spPr>
           <a:xfrm>
-            <a:off x="743891" y="1051899"/>
-            <a:ext cx="4568806" cy="1547186"/>
+            <a:off x="682328" y="920267"/>
+            <a:ext cx="4190702" cy="1353575"/>
           </a:xfrm>
         </p:spPr>
         <p:txBody>
@@ -1481,8 +1481,8 @@
         </p:nvSpPr>
         <p:spPr>
           <a:xfrm>
-            <a:off x="5467380" y="705933"/>
-            <a:ext cx="4591306" cy="345967"/>
+            <a:off x="5014913" y="617594"/>
+            <a:ext cx="4211340" cy="302673"/>
           </a:xfrm>
         </p:spPr>
         <p:txBody>
@@ -1490,39 +1490,39 @@
           <a:lstStyle>
             <a:lvl1pPr marL="0" indent="0">
               <a:buNone/>
-              <a:defRPr sz="1008" b="1"/>
+              <a:defRPr sz="882" b="1"/>
             </a:lvl1pPr>
-            <a:lvl2pPr marL="191978" indent="0">
-              <a:buNone/>
-              <a:defRPr sz="840" b="1"/>
+            <a:lvl2pPr marL="167975" indent="0">
+              <a:buNone/>
+              <a:defRPr sz="735" b="1"/>
             </a:lvl2pPr>
-            <a:lvl3pPr marL="383957" indent="0">
-              <a:buNone/>
-              <a:defRPr sz="756" b="1"/>
+            <a:lvl3pPr marL="335951" indent="0">
+              <a:buNone/>
+              <a:defRPr sz="661" b="1"/>
             </a:lvl3pPr>
-            <a:lvl4pPr marL="575935" indent="0">
-              <a:buNone/>
-              <a:defRPr sz="672" b="1"/>
+            <a:lvl4pPr marL="503926" indent="0">
+              <a:buNone/>
+              <a:defRPr sz="588" b="1"/>
             </a:lvl4pPr>
-            <a:lvl5pPr marL="767913" indent="0">
-              <a:buNone/>
-              <a:defRPr sz="672" b="1"/>
+            <a:lvl5pPr marL="671901" indent="0">
+              <a:buNone/>
+              <a:defRPr sz="588" b="1"/>
             </a:lvl5pPr>
-            <a:lvl6pPr marL="959891" indent="0">
-              <a:buNone/>
-              <a:defRPr sz="672" b="1"/>
+            <a:lvl6pPr marL="839876" indent="0">
+              <a:buNone/>
+              <a:defRPr sz="588" b="1"/>
             </a:lvl6pPr>
-            <a:lvl7pPr marL="1151870" indent="0">
-              <a:buNone/>
-              <a:defRPr sz="672" b="1"/>
+            <a:lvl7pPr marL="1007852" indent="0">
+              <a:buNone/>
+              <a:defRPr sz="588" b="1"/>
             </a:lvl7pPr>
-            <a:lvl8pPr marL="1343848" indent="0">
-              <a:buNone/>
-              <a:defRPr sz="672" b="1"/>
+            <a:lvl8pPr marL="1175827" indent="0">
+              <a:buNone/>
+              <a:defRPr sz="588" b="1"/>
             </a:lvl8pPr>
-            <a:lvl9pPr marL="1535826" indent="0">
-              <a:buNone/>
-              <a:defRPr sz="672" b="1"/>
+            <a:lvl9pPr marL="1343802" indent="0">
+              <a:buNone/>
+              <a:defRPr sz="588" b="1"/>
             </a:lvl9pPr>
           </a:lstStyle>
           <a:p>
@@ -1546,8 +1546,8 @@
         </p:nvSpPr>
         <p:spPr>
           <a:xfrm>
-            <a:off x="5467380" y="1051899"/>
-            <a:ext cx="4591306" cy="1547186"/>
+            <a:off x="5014913" y="920267"/>
+            <a:ext cx="4211340" cy="1353575"/>
           </a:xfrm>
         </p:spPr>
         <p:txBody>
@@ -1608,7 +1608,7 @@
           <a:p>
             <a:fld id="{40ACB8D9-02A8-431F-86FB-1060DDC6D7B5}" type="datetimeFigureOut">
               <a:rPr lang="zh-TW" altLang="en-US" smtClean="0"/>
-              <a:t>2026/4/20</a:t>
+              <a:t>2026/5/20</a:t>
             </a:fld>
             <a:endParaRPr lang="zh-TW" altLang="en-US"/>
           </a:p>
@@ -1659,7 +1659,7 @@
     </p:spTree>
     <p:extLst>
       <p:ext uri="{BB962C8B-B14F-4D97-AF65-F5344CB8AC3E}">
-        <p14:creationId xmlns:p14="http://schemas.microsoft.com/office/powerpoint/2010/main" val="1732443367"/>
+        <p14:creationId xmlns:p14="http://schemas.microsoft.com/office/powerpoint/2010/main" val="4064333070"/>
       </p:ext>
     </p:extLst>
   </p:cSld>
@@ -1726,7 +1726,7 @@
           <a:p>
             <a:fld id="{40ACB8D9-02A8-431F-86FB-1060DDC6D7B5}" type="datetimeFigureOut">
               <a:rPr lang="zh-TW" altLang="en-US" smtClean="0"/>
-              <a:t>2026/4/20</a:t>
+              <a:t>2026/5/20</a:t>
             </a:fld>
             <a:endParaRPr lang="zh-TW" altLang="en-US"/>
           </a:p>
@@ -1777,7 +1777,7 @@
     </p:spTree>
     <p:extLst>
       <p:ext uri="{BB962C8B-B14F-4D97-AF65-F5344CB8AC3E}">
-        <p14:creationId xmlns:p14="http://schemas.microsoft.com/office/powerpoint/2010/main" val="1483605444"/>
+        <p14:creationId xmlns:p14="http://schemas.microsoft.com/office/powerpoint/2010/main" val="86773679"/>
       </p:ext>
     </p:extLst>
   </p:cSld>
@@ -1821,7 +1821,7 @@
           <a:p>
             <a:fld id="{40ACB8D9-02A8-431F-86FB-1060DDC6D7B5}" type="datetimeFigureOut">
               <a:rPr lang="zh-TW" altLang="en-US" smtClean="0"/>
-              <a:t>2026/4/20</a:t>
+              <a:t>2026/5/20</a:t>
             </a:fld>
             <a:endParaRPr lang="zh-TW" altLang="en-US"/>
           </a:p>
@@ -1872,7 +1872,7 @@
     </p:spTree>
     <p:extLst>
       <p:ext uri="{BB962C8B-B14F-4D97-AF65-F5344CB8AC3E}">
-        <p14:creationId xmlns:p14="http://schemas.microsoft.com/office/powerpoint/2010/main" val="3368485889"/>
+        <p14:creationId xmlns:p14="http://schemas.microsoft.com/office/powerpoint/2010/main" val="4267751930"/>
       </p:ext>
     </p:extLst>
   </p:cSld>
@@ -1911,15 +1911,15 @@
         </p:nvSpPr>
         <p:spPr>
           <a:xfrm>
-            <a:off x="743891" y="191982"/>
-            <a:ext cx="3483204" cy="671936"/>
+            <a:off x="682328" y="167958"/>
+            <a:ext cx="3194943" cy="587851"/>
           </a:xfrm>
         </p:spPr>
         <p:txBody>
           <a:bodyPr anchor="b"/>
           <a:lstStyle>
             <a:lvl1pPr>
-              <a:defRPr sz="1344"/>
+              <a:defRPr sz="1176"/>
             </a:lvl1pPr>
           </a:lstStyle>
           <a:p>
@@ -1943,39 +1943,39 @@
         </p:nvSpPr>
         <p:spPr>
           <a:xfrm>
-            <a:off x="4591306" y="414627"/>
-            <a:ext cx="5467380" cy="2046471"/>
+            <a:off x="4211340" y="362742"/>
+            <a:ext cx="5014913" cy="1790381"/>
           </a:xfrm>
         </p:spPr>
         <p:txBody>
           <a:bodyPr/>
           <a:lstStyle>
             <a:lvl1pPr>
-              <a:defRPr sz="1344"/>
+              <a:defRPr sz="1176"/>
             </a:lvl1pPr>
             <a:lvl2pPr>
-              <a:defRPr sz="1176"/>
+              <a:defRPr sz="1029"/>
             </a:lvl2pPr>
             <a:lvl3pPr>
-              <a:defRPr sz="1008"/>
+              <a:defRPr sz="882"/>
             </a:lvl3pPr>
             <a:lvl4pPr>
-              <a:defRPr sz="840"/>
+              <a:defRPr sz="735"/>
             </a:lvl4pPr>
             <a:lvl5pPr>
-              <a:defRPr sz="840"/>
+              <a:defRPr sz="735"/>
             </a:lvl5pPr>
             <a:lvl6pPr>
-              <a:defRPr sz="840"/>
+              <a:defRPr sz="735"/>
             </a:lvl6pPr>
             <a:lvl7pPr>
-              <a:defRPr sz="840"/>
+              <a:defRPr sz="735"/>
             </a:lvl7pPr>
             <a:lvl8pPr>
-              <a:defRPr sz="840"/>
+              <a:defRPr sz="735"/>
             </a:lvl8pPr>
             <a:lvl9pPr>
-              <a:defRPr sz="840"/>
+              <a:defRPr sz="735"/>
             </a:lvl9pPr>
           </a:lstStyle>
           <a:p>
@@ -2028,8 +2028,8 @@
         </p:nvSpPr>
         <p:spPr>
           <a:xfrm>
-            <a:off x="743891" y="863918"/>
-            <a:ext cx="3483204" cy="1600514"/>
+            <a:off x="682328" y="755809"/>
+            <a:ext cx="3194943" cy="1400229"/>
           </a:xfrm>
         </p:spPr>
         <p:txBody>
@@ -2037,39 +2037,39 @@
           <a:lstStyle>
             <a:lvl1pPr marL="0" indent="0">
               <a:buNone/>
-              <a:defRPr sz="672"/>
+              <a:defRPr sz="588"/>
             </a:lvl1pPr>
-            <a:lvl2pPr marL="191978" indent="0">
-              <a:buNone/>
-              <a:defRPr sz="588"/>
+            <a:lvl2pPr marL="167975" indent="0">
+              <a:buNone/>
+              <a:defRPr sz="514"/>
             </a:lvl2pPr>
-            <a:lvl3pPr marL="383957" indent="0">
-              <a:buNone/>
-              <a:defRPr sz="504"/>
+            <a:lvl3pPr marL="335951" indent="0">
+              <a:buNone/>
+              <a:defRPr sz="441"/>
             </a:lvl3pPr>
-            <a:lvl4pPr marL="575935" indent="0">
-              <a:buNone/>
-              <a:defRPr sz="420"/>
+            <a:lvl4pPr marL="503926" indent="0">
+              <a:buNone/>
+              <a:defRPr sz="367"/>
             </a:lvl4pPr>
-            <a:lvl5pPr marL="767913" indent="0">
-              <a:buNone/>
-              <a:defRPr sz="420"/>
+            <a:lvl5pPr marL="671901" indent="0">
+              <a:buNone/>
+              <a:defRPr sz="367"/>
             </a:lvl5pPr>
-            <a:lvl6pPr marL="959891" indent="0">
-              <a:buNone/>
-              <a:defRPr sz="420"/>
+            <a:lvl6pPr marL="839876" indent="0">
+              <a:buNone/>
+              <a:defRPr sz="367"/>
             </a:lvl6pPr>
-            <a:lvl7pPr marL="1151870" indent="0">
-              <a:buNone/>
-              <a:defRPr sz="420"/>
+            <a:lvl7pPr marL="1007852" indent="0">
+              <a:buNone/>
+              <a:defRPr sz="367"/>
             </a:lvl7pPr>
-            <a:lvl8pPr marL="1343848" indent="0">
-              <a:buNone/>
-              <a:defRPr sz="420"/>
+            <a:lvl8pPr marL="1175827" indent="0">
+              <a:buNone/>
+              <a:defRPr sz="367"/>
             </a:lvl8pPr>
-            <a:lvl9pPr marL="1535826" indent="0">
-              <a:buNone/>
-              <a:defRPr sz="420"/>
+            <a:lvl9pPr marL="1343802" indent="0">
+              <a:buNone/>
+              <a:defRPr sz="367"/>
             </a:lvl9pPr>
           </a:lstStyle>
           <a:p>
@@ -2098,7 +2098,7 @@
           <a:p>
             <a:fld id="{40ACB8D9-02A8-431F-86FB-1060DDC6D7B5}" type="datetimeFigureOut">
               <a:rPr lang="zh-TW" altLang="en-US" smtClean="0"/>
-              <a:t>2026/4/20</a:t>
+              <a:t>2026/5/20</a:t>
             </a:fld>
             <a:endParaRPr lang="zh-TW" altLang="en-US"/>
           </a:p>
@@ -2149,7 +2149,7 @@
     </p:spTree>
     <p:extLst>
       <p:ext uri="{BB962C8B-B14F-4D97-AF65-F5344CB8AC3E}">
-        <p14:creationId xmlns:p14="http://schemas.microsoft.com/office/powerpoint/2010/main" val="281421146"/>
+        <p14:creationId xmlns:p14="http://schemas.microsoft.com/office/powerpoint/2010/main" val="4248161148"/>
       </p:ext>
     </p:extLst>
   </p:cSld>
@@ -2188,15 +2188,15 @@
         </p:nvSpPr>
         <p:spPr>
           <a:xfrm>
-            <a:off x="743891" y="191982"/>
-            <a:ext cx="3483204" cy="671936"/>
+            <a:off x="682328" y="167958"/>
+            <a:ext cx="3194943" cy="587851"/>
           </a:xfrm>
         </p:spPr>
         <p:txBody>
           <a:bodyPr anchor="b"/>
           <a:lstStyle>
             <a:lvl1pPr>
-              <a:defRPr sz="1344"/>
+              <a:defRPr sz="1176"/>
             </a:lvl1pPr>
           </a:lstStyle>
           <a:p>
@@ -2220,8 +2220,8 @@
         </p:nvSpPr>
         <p:spPr>
           <a:xfrm>
-            <a:off x="4591306" y="414627"/>
-            <a:ext cx="5467380" cy="2046471"/>
+            <a:off x="4211340" y="362742"/>
+            <a:ext cx="5014913" cy="1790381"/>
           </a:xfrm>
         </p:spPr>
         <p:txBody>
@@ -2229,39 +2229,39 @@
           <a:lstStyle>
             <a:lvl1pPr marL="0" indent="0">
               <a:buNone/>
-              <a:defRPr sz="1344"/>
+              <a:defRPr sz="1176"/>
             </a:lvl1pPr>
-            <a:lvl2pPr marL="191978" indent="0">
-              <a:buNone/>
-              <a:defRPr sz="1176"/>
+            <a:lvl2pPr marL="167975" indent="0">
+              <a:buNone/>
+              <a:defRPr sz="1029"/>
             </a:lvl2pPr>
-            <a:lvl3pPr marL="383957" indent="0">
-              <a:buNone/>
-              <a:defRPr sz="1008"/>
+            <a:lvl3pPr marL="335951" indent="0">
+              <a:buNone/>
+              <a:defRPr sz="882"/>
             </a:lvl3pPr>
-            <a:lvl4pPr marL="575935" indent="0">
-              <a:buNone/>
-              <a:defRPr sz="840"/>
+            <a:lvl4pPr marL="503926" indent="0">
+              <a:buNone/>
+              <a:defRPr sz="735"/>
             </a:lvl4pPr>
-            <a:lvl5pPr marL="767913" indent="0">
-              <a:buNone/>
-              <a:defRPr sz="840"/>
+            <a:lvl5pPr marL="671901" indent="0">
+              <a:buNone/>
+              <a:defRPr sz="735"/>
             </a:lvl5pPr>
-            <a:lvl6pPr marL="959891" indent="0">
-              <a:buNone/>
-              <a:defRPr sz="840"/>
+            <a:lvl6pPr marL="839876" indent="0">
+              <a:buNone/>
+              <a:defRPr sz="735"/>
             </a:lvl6pPr>
-            <a:lvl7pPr marL="1151870" indent="0">
-              <a:buNone/>
-              <a:defRPr sz="840"/>
+            <a:lvl7pPr marL="1007852" indent="0">
+              <a:buNone/>
+              <a:defRPr sz="735"/>
             </a:lvl7pPr>
-            <a:lvl8pPr marL="1343848" indent="0">
-              <a:buNone/>
-              <a:defRPr sz="840"/>
+            <a:lvl8pPr marL="1175827" indent="0">
+              <a:buNone/>
+              <a:defRPr sz="735"/>
             </a:lvl8pPr>
-            <a:lvl9pPr marL="1535826" indent="0">
-              <a:buNone/>
-              <a:defRPr sz="840"/>
+            <a:lvl9pPr marL="1343802" indent="0">
+              <a:buNone/>
+              <a:defRPr sz="735"/>
             </a:lvl9pPr>
           </a:lstStyle>
           <a:p>
@@ -2285,8 +2285,8 @@
         </p:nvSpPr>
         <p:spPr>
           <a:xfrm>
-            <a:off x="743891" y="863918"/>
-            <a:ext cx="3483204" cy="1600514"/>
+            <a:off x="682328" y="755809"/>
+            <a:ext cx="3194943" cy="1400229"/>
           </a:xfrm>
         </p:spPr>
         <p:txBody>
@@ -2294,39 +2294,39 @@
           <a:lstStyle>
             <a:lvl1pPr marL="0" indent="0">
               <a:buNone/>
-              <a:defRPr sz="672"/>
+              <a:defRPr sz="588"/>
             </a:lvl1pPr>
-            <a:lvl2pPr marL="191978" indent="0">
-              <a:buNone/>
-              <a:defRPr sz="588"/>
+            <a:lvl2pPr marL="167975" indent="0">
+              <a:buNone/>
+              <a:defRPr sz="514"/>
             </a:lvl2pPr>
-            <a:lvl3pPr marL="383957" indent="0">
-              <a:buNone/>
-              <a:defRPr sz="504"/>
+            <a:lvl3pPr marL="335951" indent="0">
+              <a:buNone/>
+              <a:defRPr sz="441"/>
             </a:lvl3pPr>
-            <a:lvl4pPr marL="575935" indent="0">
-              <a:buNone/>
-              <a:defRPr sz="420"/>
+            <a:lvl4pPr marL="503926" indent="0">
+              <a:buNone/>
+              <a:defRPr sz="367"/>
             </a:lvl4pPr>
-            <a:lvl5pPr marL="767913" indent="0">
-              <a:buNone/>
-              <a:defRPr sz="420"/>
+            <a:lvl5pPr marL="671901" indent="0">
+              <a:buNone/>
+              <a:defRPr sz="367"/>
             </a:lvl5pPr>
-            <a:lvl6pPr marL="959891" indent="0">
-              <a:buNone/>
-              <a:defRPr sz="420"/>
+            <a:lvl6pPr marL="839876" indent="0">
+              <a:buNone/>
+              <a:defRPr sz="367"/>
             </a:lvl6pPr>
-            <a:lvl7pPr marL="1151870" indent="0">
-              <a:buNone/>
-              <a:defRPr sz="420"/>
+            <a:lvl7pPr marL="1007852" indent="0">
+              <a:buNone/>
+              <a:defRPr sz="367"/>
             </a:lvl7pPr>
-            <a:lvl8pPr marL="1343848" indent="0">
-              <a:buNone/>
-              <a:defRPr sz="420"/>
+            <a:lvl8pPr marL="1175827" indent="0">
+              <a:buNone/>
+              <a:defRPr sz="367"/>
             </a:lvl8pPr>
-            <a:lvl9pPr marL="1535826" indent="0">
-              <a:buNone/>
-              <a:defRPr sz="420"/>
+            <a:lvl9pPr marL="1343802" indent="0">
+              <a:buNone/>
+              <a:defRPr sz="367"/>
             </a:lvl9pPr>
           </a:lstStyle>
           <a:p>
@@ -2355,7 +2355,7 @@
           <a:p>
             <a:fld id="{40ACB8D9-02A8-431F-86FB-1060DDC6D7B5}" type="datetimeFigureOut">
               <a:rPr lang="zh-TW" altLang="en-US" smtClean="0"/>
-              <a:t>2026/4/20</a:t>
+              <a:t>2026/5/20</a:t>
             </a:fld>
             <a:endParaRPr lang="zh-TW" altLang="en-US"/>
           </a:p>
@@ -2406,7 +2406,7 @@
     </p:spTree>
     <p:extLst>
       <p:ext uri="{BB962C8B-B14F-4D97-AF65-F5344CB8AC3E}">
-        <p14:creationId xmlns:p14="http://schemas.microsoft.com/office/powerpoint/2010/main" val="224523723"/>
+        <p14:creationId xmlns:p14="http://schemas.microsoft.com/office/powerpoint/2010/main" val="2778917754"/>
       </p:ext>
     </p:extLst>
   </p:cSld>
@@ -2450,8 +2450,8 @@
         </p:nvSpPr>
         <p:spPr>
           <a:xfrm>
-            <a:off x="742484" y="153319"/>
-            <a:ext cx="9314796" cy="556614"/>
+            <a:off x="681038" y="134133"/>
+            <a:ext cx="8543925" cy="486960"/>
           </a:xfrm>
           <a:prstGeom prst="rect">
             <a:avLst/>
@@ -2483,8 +2483,8 @@
         </p:nvSpPr>
         <p:spPr>
           <a:xfrm>
-            <a:off x="742484" y="766593"/>
-            <a:ext cx="9314796" cy="1827159"/>
+            <a:off x="681038" y="670664"/>
+            <a:ext cx="8543925" cy="1598513"/>
           </a:xfrm>
           <a:prstGeom prst="rect">
             <a:avLst/>
@@ -2545,8 +2545,8 @@
         </p:nvSpPr>
         <p:spPr>
           <a:xfrm>
-            <a:off x="742484" y="2669079"/>
-            <a:ext cx="2429947" cy="153319"/>
+            <a:off x="681038" y="2335076"/>
+            <a:ext cx="2228850" cy="134133"/>
           </a:xfrm>
           <a:prstGeom prst="rect">
             <a:avLst/>
@@ -2556,7 +2556,7 @@
           <a:bodyPr vert="horz" lIns="91440" tIns="45720" rIns="91440" bIns="45720" rtlCol="0" anchor="ctr"/>
           <a:lstStyle>
             <a:lvl1pPr algn="l">
-              <a:defRPr sz="504">
+              <a:defRPr sz="441">
                 <a:solidFill>
                   <a:schemeClr val="tx1">
                     <a:tint val="75000"/>
@@ -2568,7 +2568,7 @@
           <a:p>
             <a:fld id="{40ACB8D9-02A8-431F-86FB-1060DDC6D7B5}" type="datetimeFigureOut">
               <a:rPr lang="zh-TW" altLang="en-US" smtClean="0"/>
-              <a:t>2026/4/20</a:t>
+              <a:t>2026/5/20</a:t>
             </a:fld>
             <a:endParaRPr lang="zh-TW" altLang="en-US"/>
           </a:p>
@@ -2586,8 +2586,8 @@
         </p:nvSpPr>
         <p:spPr>
           <a:xfrm>
-            <a:off x="3577422" y="2669079"/>
-            <a:ext cx="3644920" cy="153319"/>
+            <a:off x="3281363" y="2335076"/>
+            <a:ext cx="3343275" cy="134133"/>
           </a:xfrm>
           <a:prstGeom prst="rect">
             <a:avLst/>
@@ -2597,7 +2597,7 @@
           <a:bodyPr vert="horz" lIns="91440" tIns="45720" rIns="91440" bIns="45720" rtlCol="0" anchor="ctr"/>
           <a:lstStyle>
             <a:lvl1pPr algn="ctr">
-              <a:defRPr sz="504">
+              <a:defRPr sz="441">
                 <a:solidFill>
                   <a:schemeClr val="tx1">
                     <a:tint val="75000"/>
@@ -2623,8 +2623,8 @@
         </p:nvSpPr>
         <p:spPr>
           <a:xfrm>
-            <a:off x="7627332" y="2669079"/>
-            <a:ext cx="2429947" cy="153319"/>
+            <a:off x="6996113" y="2335076"/>
+            <a:ext cx="2228850" cy="134133"/>
           </a:xfrm>
           <a:prstGeom prst="rect">
             <a:avLst/>
@@ -2634,7 +2634,7 @@
           <a:bodyPr vert="horz" lIns="91440" tIns="45720" rIns="91440" bIns="45720" rtlCol="0" anchor="ctr"/>
           <a:lstStyle>
             <a:lvl1pPr algn="r">
-              <a:defRPr sz="504">
+              <a:defRPr sz="441">
                 <a:solidFill>
                   <a:schemeClr val="tx1">
                     <a:tint val="75000"/>
@@ -2655,27 +2655,27 @@
     </p:spTree>
     <p:extLst>
       <p:ext uri="{BB962C8B-B14F-4D97-AF65-F5344CB8AC3E}">
-        <p14:creationId xmlns:p14="http://schemas.microsoft.com/office/powerpoint/2010/main" val="3301387218"/>
+        <p14:creationId xmlns:p14="http://schemas.microsoft.com/office/powerpoint/2010/main" val="46675214"/>
       </p:ext>
     </p:extLst>
   </p:cSld>
   <p:clrMap bg1="lt1" tx1="dk1" bg2="lt2" tx2="dk2" accent1="accent1" accent2="accent2" accent3="accent3" accent4="accent4" accent5="accent5" accent6="accent6" hlink="hlink" folHlink="folHlink"/>
   <p:sldLayoutIdLst>
-    <p:sldLayoutId id="2147483685" r:id="rId1"/>
-    <p:sldLayoutId id="2147483686" r:id="rId2"/>
-    <p:sldLayoutId id="2147483687" r:id="rId3"/>
-    <p:sldLayoutId id="2147483688" r:id="rId4"/>
-    <p:sldLayoutId id="2147483689" r:id="rId5"/>
-    <p:sldLayoutId id="2147483690" r:id="rId6"/>
-    <p:sldLayoutId id="2147483691" r:id="rId7"/>
-    <p:sldLayoutId id="2147483692" r:id="rId8"/>
-    <p:sldLayoutId id="2147483693" r:id="rId9"/>
-    <p:sldLayoutId id="2147483694" r:id="rId10"/>
-    <p:sldLayoutId id="2147483695" r:id="rId11"/>
+    <p:sldLayoutId id="2147483721" r:id="rId1"/>
+    <p:sldLayoutId id="2147483722" r:id="rId2"/>
+    <p:sldLayoutId id="2147483723" r:id="rId3"/>
+    <p:sldLayoutId id="2147483724" r:id="rId4"/>
+    <p:sldLayoutId id="2147483725" r:id="rId5"/>
+    <p:sldLayoutId id="2147483726" r:id="rId6"/>
+    <p:sldLayoutId id="2147483727" r:id="rId7"/>
+    <p:sldLayoutId id="2147483728" r:id="rId8"/>
+    <p:sldLayoutId id="2147483729" r:id="rId9"/>
+    <p:sldLayoutId id="2147483730" r:id="rId10"/>
+    <p:sldLayoutId id="2147483731" r:id="rId11"/>
   </p:sldLayoutIdLst>
   <p:txStyles>
     <p:titleStyle>
-      <a:lvl1pPr algn="l" defTabSz="383957" rtl="0" eaLnBrk="1" latinLnBrk="0" hangingPunct="1">
+      <a:lvl1pPr algn="l" defTabSz="335951" rtl="0" eaLnBrk="1" latinLnBrk="0" hangingPunct="1">
         <a:lnSpc>
           <a:spcPct val="90000"/>
         </a:lnSpc>
@@ -2683,7 +2683,7 @@
           <a:spcPct val="0"/>
         </a:spcBef>
         <a:buNone/>
-        <a:defRPr sz="1848" kern="1200">
+        <a:defRPr sz="1617" kern="1200">
           <a:solidFill>
             <a:schemeClr val="tx1"/>
           </a:solidFill>
@@ -2694,16 +2694,16 @@
       </a:lvl1pPr>
     </p:titleStyle>
     <p:bodyStyle>
-      <a:lvl1pPr marL="95989" indent="-95989" algn="l" defTabSz="383957" rtl="0" eaLnBrk="1" latinLnBrk="0" hangingPunct="1">
+      <a:lvl1pPr marL="83988" indent="-83988" algn="l" defTabSz="335951" rtl="0" eaLnBrk="1" latinLnBrk="0" hangingPunct="1">
         <a:lnSpc>
           <a:spcPct val="90000"/>
         </a:lnSpc>
         <a:spcBef>
-          <a:spcPts val="420"/>
+          <a:spcPts val="367"/>
         </a:spcBef>
         <a:buFont typeface="Arial" panose="020B0604020202020204" pitchFamily="34" charset="0"/>
         <a:buChar char="•"/>
-        <a:defRPr sz="1176" kern="1200">
+        <a:defRPr sz="1029" kern="1200">
           <a:solidFill>
             <a:schemeClr val="tx1"/>
           </a:solidFill>
@@ -2712,16 +2712,16 @@
           <a:cs typeface="+mn-cs"/>
         </a:defRPr>
       </a:lvl1pPr>
-      <a:lvl2pPr marL="287967" indent="-95989" algn="l" defTabSz="383957" rtl="0" eaLnBrk="1" latinLnBrk="0" hangingPunct="1">
+      <a:lvl2pPr marL="251963" indent="-83988" algn="l" defTabSz="335951" rtl="0" eaLnBrk="1" latinLnBrk="0" hangingPunct="1">
         <a:lnSpc>
           <a:spcPct val="90000"/>
         </a:lnSpc>
         <a:spcBef>
-          <a:spcPts val="210"/>
+          <a:spcPts val="184"/>
         </a:spcBef>
         <a:buFont typeface="Arial" panose="020B0604020202020204" pitchFamily="34" charset="0"/>
         <a:buChar char="•"/>
-        <a:defRPr sz="1008" kern="1200">
+        <a:defRPr sz="882" kern="1200">
           <a:solidFill>
             <a:schemeClr val="tx1"/>
           </a:solidFill>
@@ -2730,16 +2730,16 @@
           <a:cs typeface="+mn-cs"/>
         </a:defRPr>
       </a:lvl2pPr>
-      <a:lvl3pPr marL="479946" indent="-95989" algn="l" defTabSz="383957" rtl="0" eaLnBrk="1" latinLnBrk="0" hangingPunct="1">
+      <a:lvl3pPr marL="419938" indent="-83988" algn="l" defTabSz="335951" rtl="0" eaLnBrk="1" latinLnBrk="0" hangingPunct="1">
         <a:lnSpc>
           <a:spcPct val="90000"/>
         </a:lnSpc>
         <a:spcBef>
-          <a:spcPts val="210"/>
+          <a:spcPts val="184"/>
         </a:spcBef>
         <a:buFont typeface="Arial" panose="020B0604020202020204" pitchFamily="34" charset="0"/>
         <a:buChar char="•"/>
-        <a:defRPr sz="840" kern="1200">
+        <a:defRPr sz="735" kern="1200">
           <a:solidFill>
             <a:schemeClr val="tx1"/>
           </a:solidFill>
@@ -2748,16 +2748,16 @@
           <a:cs typeface="+mn-cs"/>
         </a:defRPr>
       </a:lvl3pPr>
-      <a:lvl4pPr marL="671924" indent="-95989" algn="l" defTabSz="383957" rtl="0" eaLnBrk="1" latinLnBrk="0" hangingPunct="1">
+      <a:lvl4pPr marL="587913" indent="-83988" algn="l" defTabSz="335951" rtl="0" eaLnBrk="1" latinLnBrk="0" hangingPunct="1">
         <a:lnSpc>
           <a:spcPct val="90000"/>
         </a:lnSpc>
         <a:spcBef>
-          <a:spcPts val="210"/>
+          <a:spcPts val="184"/>
         </a:spcBef>
         <a:buFont typeface="Arial" panose="020B0604020202020204" pitchFamily="34" charset="0"/>
         <a:buChar char="•"/>
-        <a:defRPr sz="756" kern="1200">
+        <a:defRPr sz="661" kern="1200">
           <a:solidFill>
             <a:schemeClr val="tx1"/>
           </a:solidFill>
@@ -2766,16 +2766,16 @@
           <a:cs typeface="+mn-cs"/>
         </a:defRPr>
       </a:lvl4pPr>
-      <a:lvl5pPr marL="863902" indent="-95989" algn="l" defTabSz="383957" rtl="0" eaLnBrk="1" latinLnBrk="0" hangingPunct="1">
+      <a:lvl5pPr marL="755889" indent="-83988" algn="l" defTabSz="335951" rtl="0" eaLnBrk="1" latinLnBrk="0" hangingPunct="1">
         <a:lnSpc>
           <a:spcPct val="90000"/>
         </a:lnSpc>
         <a:spcBef>
-          <a:spcPts val="210"/>
+          <a:spcPts val="184"/>
         </a:spcBef>
         <a:buFont typeface="Arial" panose="020B0604020202020204" pitchFamily="34" charset="0"/>
         <a:buChar char="•"/>
-        <a:defRPr sz="756" kern="1200">
+        <a:defRPr sz="661" kern="1200">
           <a:solidFill>
             <a:schemeClr val="tx1"/>
           </a:solidFill>
@@ -2784,16 +2784,16 @@
           <a:cs typeface="+mn-cs"/>
         </a:defRPr>
       </a:lvl5pPr>
-      <a:lvl6pPr marL="1055881" indent="-95989" algn="l" defTabSz="383957" rtl="0" eaLnBrk="1" latinLnBrk="0" hangingPunct="1">
+      <a:lvl6pPr marL="923864" indent="-83988" algn="l" defTabSz="335951" rtl="0" eaLnBrk="1" latinLnBrk="0" hangingPunct="1">
         <a:lnSpc>
           <a:spcPct val="90000"/>
         </a:lnSpc>
         <a:spcBef>
-          <a:spcPts val="210"/>
+          <a:spcPts val="184"/>
         </a:spcBef>
         <a:buFont typeface="Arial" panose="020B0604020202020204" pitchFamily="34" charset="0"/>
         <a:buChar char="•"/>
-        <a:defRPr sz="756" kern="1200">
+        <a:defRPr sz="661" kern="1200">
           <a:solidFill>
             <a:schemeClr val="tx1"/>
           </a:solidFill>
@@ -2802,16 +2802,16 @@
           <a:cs typeface="+mn-cs"/>
         </a:defRPr>
       </a:lvl6pPr>
-      <a:lvl7pPr marL="1247859" indent="-95989" algn="l" defTabSz="383957" rtl="0" eaLnBrk="1" latinLnBrk="0" hangingPunct="1">
+      <a:lvl7pPr marL="1091839" indent="-83988" algn="l" defTabSz="335951" rtl="0" eaLnBrk="1" latinLnBrk="0" hangingPunct="1">
         <a:lnSpc>
           <a:spcPct val="90000"/>
         </a:lnSpc>
         <a:spcBef>
-          <a:spcPts val="210"/>
+          <a:spcPts val="184"/>
         </a:spcBef>
         <a:buFont typeface="Arial" panose="020B0604020202020204" pitchFamily="34" charset="0"/>
         <a:buChar char="•"/>
-        <a:defRPr sz="756" kern="1200">
+        <a:defRPr sz="661" kern="1200">
           <a:solidFill>
             <a:schemeClr val="tx1"/>
           </a:solidFill>
@@ -2820,16 +2820,16 @@
           <a:cs typeface="+mn-cs"/>
         </a:defRPr>
       </a:lvl7pPr>
-      <a:lvl8pPr marL="1439837" indent="-95989" algn="l" defTabSz="383957" rtl="0" eaLnBrk="1" latinLnBrk="0" hangingPunct="1">
+      <a:lvl8pPr marL="1259815" indent="-83988" algn="l" defTabSz="335951" rtl="0" eaLnBrk="1" latinLnBrk="0" hangingPunct="1">
         <a:lnSpc>
           <a:spcPct val="90000"/>
         </a:lnSpc>
         <a:spcBef>
-          <a:spcPts val="210"/>
+          <a:spcPts val="184"/>
         </a:spcBef>
         <a:buFont typeface="Arial" panose="020B0604020202020204" pitchFamily="34" charset="0"/>
         <a:buChar char="•"/>
-        <a:defRPr sz="756" kern="1200">
+        <a:defRPr sz="661" kern="1200">
           <a:solidFill>
             <a:schemeClr val="tx1"/>
           </a:solidFill>
@@ -2838,16 +2838,16 @@
           <a:cs typeface="+mn-cs"/>
         </a:defRPr>
       </a:lvl8pPr>
-      <a:lvl9pPr marL="1631815" indent="-95989" algn="l" defTabSz="383957" rtl="0" eaLnBrk="1" latinLnBrk="0" hangingPunct="1">
+      <a:lvl9pPr marL="1427790" indent="-83988" algn="l" defTabSz="335951" rtl="0" eaLnBrk="1" latinLnBrk="0" hangingPunct="1">
         <a:lnSpc>
           <a:spcPct val="90000"/>
         </a:lnSpc>
         <a:spcBef>
-          <a:spcPts val="210"/>
+          <a:spcPts val="184"/>
         </a:spcBef>
         <a:buFont typeface="Arial" panose="020B0604020202020204" pitchFamily="34" charset="0"/>
         <a:buChar char="•"/>
-        <a:defRPr sz="756" kern="1200">
+        <a:defRPr sz="661" kern="1200">
           <a:solidFill>
             <a:schemeClr val="tx1"/>
           </a:solidFill>
@@ -2861,8 +2861,8 @@
       <a:defPPr>
         <a:defRPr lang="en-US"/>
       </a:defPPr>
-      <a:lvl1pPr marL="0" algn="l" defTabSz="383957" rtl="0" eaLnBrk="1" latinLnBrk="0" hangingPunct="1">
-        <a:defRPr sz="756" kern="1200">
+      <a:lvl1pPr marL="0" algn="l" defTabSz="335951" rtl="0" eaLnBrk="1" latinLnBrk="0" hangingPunct="1">
+        <a:defRPr sz="661" kern="1200">
           <a:solidFill>
             <a:schemeClr val="tx1"/>
           </a:solidFill>
@@ -2871,8 +2871,8 @@
           <a:cs typeface="+mn-cs"/>
         </a:defRPr>
       </a:lvl1pPr>
-      <a:lvl2pPr marL="191978" algn="l" defTabSz="383957" rtl="0" eaLnBrk="1" latinLnBrk="0" hangingPunct="1">
-        <a:defRPr sz="756" kern="1200">
+      <a:lvl2pPr marL="167975" algn="l" defTabSz="335951" rtl="0" eaLnBrk="1" latinLnBrk="0" hangingPunct="1">
+        <a:defRPr sz="661" kern="1200">
           <a:solidFill>
             <a:schemeClr val="tx1"/>
           </a:solidFill>
@@ -2881,8 +2881,8 @@
           <a:cs typeface="+mn-cs"/>
         </a:defRPr>
       </a:lvl2pPr>
-      <a:lvl3pPr marL="383957" algn="l" defTabSz="383957" rtl="0" eaLnBrk="1" latinLnBrk="0" hangingPunct="1">
-        <a:defRPr sz="756" kern="1200">
+      <a:lvl3pPr marL="335951" algn="l" defTabSz="335951" rtl="0" eaLnBrk="1" latinLnBrk="0" hangingPunct="1">
+        <a:defRPr sz="661" kern="1200">
           <a:solidFill>
             <a:schemeClr val="tx1"/>
           </a:solidFill>
@@ -2891,8 +2891,8 @@
           <a:cs typeface="+mn-cs"/>
         </a:defRPr>
       </a:lvl3pPr>
-      <a:lvl4pPr marL="575935" algn="l" defTabSz="383957" rtl="0" eaLnBrk="1" latinLnBrk="0" hangingPunct="1">
-        <a:defRPr sz="756" kern="1200">
+      <a:lvl4pPr marL="503926" algn="l" defTabSz="335951" rtl="0" eaLnBrk="1" latinLnBrk="0" hangingPunct="1">
+        <a:defRPr sz="661" kern="1200">
           <a:solidFill>
             <a:schemeClr val="tx1"/>
           </a:solidFill>
@@ -2901,8 +2901,8 @@
           <a:cs typeface="+mn-cs"/>
         </a:defRPr>
       </a:lvl4pPr>
-      <a:lvl5pPr marL="767913" algn="l" defTabSz="383957" rtl="0" eaLnBrk="1" latinLnBrk="0" hangingPunct="1">
-        <a:defRPr sz="756" kern="1200">
+      <a:lvl5pPr marL="671901" algn="l" defTabSz="335951" rtl="0" eaLnBrk="1" latinLnBrk="0" hangingPunct="1">
+        <a:defRPr sz="661" kern="1200">
           <a:solidFill>
             <a:schemeClr val="tx1"/>
           </a:solidFill>
@@ -2911,8 +2911,8 @@
           <a:cs typeface="+mn-cs"/>
         </a:defRPr>
       </a:lvl5pPr>
-      <a:lvl6pPr marL="959891" algn="l" defTabSz="383957" rtl="0" eaLnBrk="1" latinLnBrk="0" hangingPunct="1">
-        <a:defRPr sz="756" kern="1200">
+      <a:lvl6pPr marL="839876" algn="l" defTabSz="335951" rtl="0" eaLnBrk="1" latinLnBrk="0" hangingPunct="1">
+        <a:defRPr sz="661" kern="1200">
           <a:solidFill>
             <a:schemeClr val="tx1"/>
           </a:solidFill>
@@ -2921,8 +2921,8 @@
           <a:cs typeface="+mn-cs"/>
         </a:defRPr>
       </a:lvl6pPr>
-      <a:lvl7pPr marL="1151870" algn="l" defTabSz="383957" rtl="0" eaLnBrk="1" latinLnBrk="0" hangingPunct="1">
-        <a:defRPr sz="756" kern="1200">
+      <a:lvl7pPr marL="1007852" algn="l" defTabSz="335951" rtl="0" eaLnBrk="1" latinLnBrk="0" hangingPunct="1">
+        <a:defRPr sz="661" kern="1200">
           <a:solidFill>
             <a:schemeClr val="tx1"/>
           </a:solidFill>
@@ -2931,8 +2931,8 @@
           <a:cs typeface="+mn-cs"/>
         </a:defRPr>
       </a:lvl7pPr>
-      <a:lvl8pPr marL="1343848" algn="l" defTabSz="383957" rtl="0" eaLnBrk="1" latinLnBrk="0" hangingPunct="1">
-        <a:defRPr sz="756" kern="1200">
+      <a:lvl8pPr marL="1175827" algn="l" defTabSz="335951" rtl="0" eaLnBrk="1" latinLnBrk="0" hangingPunct="1">
+        <a:defRPr sz="661" kern="1200">
           <a:solidFill>
             <a:schemeClr val="tx1"/>
           </a:solidFill>
@@ -2941,8 +2941,8 @@
           <a:cs typeface="+mn-cs"/>
         </a:defRPr>
       </a:lvl8pPr>
-      <a:lvl9pPr marL="1535826" algn="l" defTabSz="383957" rtl="0" eaLnBrk="1" latinLnBrk="0" hangingPunct="1">
-        <a:defRPr sz="756" kern="1200">
+      <a:lvl9pPr marL="1343802" algn="l" defTabSz="335951" rtl="0" eaLnBrk="1" latinLnBrk="0" hangingPunct="1">
+        <a:defRPr sz="661" kern="1200">
           <a:solidFill>
             <a:schemeClr val="tx1"/>
           </a:solidFill>
@@ -2987,8 +2987,8 @@
         </p:nvGrpSpPr>
         <p:grpSpPr>
           <a:xfrm>
-            <a:off x="63546" y="111805"/>
-            <a:ext cx="10672670" cy="2656114"/>
+            <a:off x="58290" y="41535"/>
+            <a:ext cx="9789425" cy="2436299"/>
             <a:chOff x="254046" y="111805"/>
             <a:chExt cx="10672670" cy="2656114"/>
           </a:xfrm>
@@ -3112,7 +3112,7 @@
               </a:fontRef>
             </p:style>
             <p:txBody>
-              <a:bodyPr rot="0" spcFirstLastPara="0" vertOverflow="overflow" horzOverflow="overflow" vert="horz" wrap="square" lIns="91440" tIns="45720" rIns="91440" bIns="45720" numCol="1" spcCol="0" rtlCol="0" fromWordArt="0" anchor="ctr" anchorCtr="0" forceAA="0" compatLnSpc="1">
+              <a:bodyPr rot="0" spcFirstLastPara="0" vertOverflow="overflow" horzOverflow="overflow" vert="horz" wrap="square" lIns="83873" tIns="41935" rIns="83873" bIns="41935" numCol="1" spcCol="0" rtlCol="0" fromWordArt="0" anchor="ctr" anchorCtr="0" forceAA="0" compatLnSpc="1">
                 <a:prstTxWarp prst="textNoShape">
                   <a:avLst/>
                 </a:prstTxWarp>
@@ -3121,7 +3121,7 @@
               <a:lstStyle/>
               <a:p>
                 <a:pPr algn="ctr"/>
-                <a:endParaRPr lang="zh-TW" altLang="en-US"/>
+                <a:endParaRPr lang="zh-TW" altLang="en-US" sz="1650"/>
               </a:p>
             </p:txBody>
           </p:sp>
@@ -3245,7 +3245,7 @@
               </a:fontRef>
             </p:style>
             <p:txBody>
-              <a:bodyPr rot="0" spcFirstLastPara="0" vertOverflow="overflow" horzOverflow="overflow" vert="horz" wrap="square" lIns="91440" tIns="45720" rIns="91440" bIns="45720" numCol="1" spcCol="0" rtlCol="0" fromWordArt="0" anchor="ctr" anchorCtr="0" forceAA="0" compatLnSpc="1">
+              <a:bodyPr rot="0" spcFirstLastPara="0" vertOverflow="overflow" horzOverflow="overflow" vert="horz" wrap="square" lIns="83873" tIns="41935" rIns="83873" bIns="41935" numCol="1" spcCol="0" rtlCol="0" fromWordArt="0" anchor="ctr" anchorCtr="0" forceAA="0" compatLnSpc="1">
                 <a:prstTxWarp prst="textNoShape">
                   <a:avLst/>
                 </a:prstTxWarp>
@@ -3254,7 +3254,7 @@
               <a:lstStyle/>
               <a:p>
                 <a:pPr algn="ctr"/>
-                <a:endParaRPr lang="zh-TW" altLang="en-US"/>
+                <a:endParaRPr lang="zh-TW" altLang="en-US" sz="1650"/>
               </a:p>
             </p:txBody>
           </p:sp>
@@ -3273,8 +3273,8 @@
           </p:nvSpPr>
           <p:spPr>
             <a:xfrm>
-              <a:off x="6900817" y="736795"/>
-              <a:ext cx="947737" cy="461665"/>
+              <a:off x="8217713" y="675259"/>
+              <a:ext cx="947739" cy="553791"/>
             </a:xfrm>
             <a:prstGeom prst="rect">
               <a:avLst/>
@@ -3288,13 +3288,13 @@
             <a:lstStyle/>
             <a:p>
               <a:r>
-                <a:rPr lang="en-US" altLang="zh-TW" sz="2400" dirty="0">
+                <a:rPr lang="en-US" altLang="zh-TW" sz="2701" dirty="0">
                   <a:latin typeface="Times New Roman" panose="02020603050405020304" pitchFamily="18" charset="0"/>
                   <a:cs typeface="Times New Roman" panose="02020603050405020304" pitchFamily="18" charset="0"/>
                 </a:rPr>
                 <a:t>GXs</a:t>
               </a:r>
-              <a:endParaRPr lang="zh-TW" altLang="en-US" sz="2400" dirty="0">
+              <a:endParaRPr lang="zh-TW" altLang="en-US" sz="2701" dirty="0">
                 <a:latin typeface="Times New Roman" panose="02020603050405020304" pitchFamily="18" charset="0"/>
                 <a:cs typeface="Times New Roman" panose="02020603050405020304" pitchFamily="18" charset="0"/>
               </a:endParaRPr>
@@ -3315,8 +3315,8 @@
           </p:nvSpPr>
           <p:spPr>
             <a:xfrm>
-              <a:off x="4747586" y="736795"/>
-              <a:ext cx="947737" cy="461665"/>
+              <a:off x="4932197" y="675259"/>
+              <a:ext cx="947739" cy="553791"/>
             </a:xfrm>
             <a:prstGeom prst="rect">
               <a:avLst/>
@@ -3330,13 +3330,13 @@
             <a:lstStyle/>
             <a:p>
               <a:r>
-                <a:rPr lang="en-US" altLang="zh-TW" sz="2400" dirty="0">
+                <a:rPr lang="en-US" altLang="zh-TW" sz="2701" dirty="0">
                   <a:latin typeface="Times New Roman" panose="02020603050405020304" pitchFamily="18" charset="0"/>
                   <a:cs typeface="Times New Roman" panose="02020603050405020304" pitchFamily="18" charset="0"/>
                 </a:rPr>
                 <a:t>DXs</a:t>
               </a:r>
-              <a:endParaRPr lang="zh-TW" altLang="en-US" sz="2400" dirty="0">
+              <a:endParaRPr lang="zh-TW" altLang="en-US" sz="2701" dirty="0">
                 <a:latin typeface="Times New Roman" panose="02020603050405020304" pitchFamily="18" charset="0"/>
                 <a:cs typeface="Times New Roman" panose="02020603050405020304" pitchFamily="18" charset="0"/>
               </a:endParaRPr>
@@ -3391,7 +3391,7 @@
             <a:lstStyle/>
             <a:p>
               <a:pPr algn="ctr"/>
-              <a:endParaRPr lang="zh-TW" altLang="en-US"/>
+              <a:endParaRPr lang="zh-TW" altLang="en-US" sz="1650"/>
             </a:p>
           </p:txBody>
         </p:sp>
@@ -3514,7 +3514,7 @@
               </a:fontRef>
             </p:style>
             <p:txBody>
-              <a:bodyPr rot="0" spcFirstLastPara="0" vertOverflow="overflow" horzOverflow="overflow" vert="horz" wrap="square" lIns="91440" tIns="45720" rIns="91440" bIns="45720" numCol="1" spcCol="0" rtlCol="0" fromWordArt="0" anchor="ctr" anchorCtr="0" forceAA="0" compatLnSpc="1">
+              <a:bodyPr rot="0" spcFirstLastPara="0" vertOverflow="overflow" horzOverflow="overflow" vert="horz" wrap="square" lIns="83873" tIns="41935" rIns="83873" bIns="41935" numCol="1" spcCol="0" rtlCol="0" fromWordArt="0" anchor="ctr" anchorCtr="0" forceAA="0" compatLnSpc="1">
                 <a:prstTxWarp prst="textNoShape">
                   <a:avLst/>
                 </a:prstTxWarp>
@@ -3523,7 +3523,7 @@
               <a:lstStyle/>
               <a:p>
                 <a:pPr algn="ctr"/>
-                <a:endParaRPr lang="zh-TW" altLang="en-US" dirty="0"/>
+                <a:endParaRPr lang="zh-TW" altLang="en-US" sz="1650" dirty="0"/>
               </a:p>
             </p:txBody>
           </p:sp>
@@ -3542,8 +3542,8 @@
           </p:nvSpPr>
           <p:spPr>
             <a:xfrm>
-              <a:off x="438796" y="736795"/>
-              <a:ext cx="947737" cy="461665"/>
+              <a:off x="1989534" y="675259"/>
+              <a:ext cx="947739" cy="553791"/>
             </a:xfrm>
             <a:prstGeom prst="rect">
               <a:avLst/>
@@ -3557,13 +3557,13 @@
             <a:lstStyle/>
             <a:p>
               <a:r>
-                <a:rPr lang="en-US" altLang="zh-TW" sz="2400" dirty="0">
+                <a:rPr lang="en-US" altLang="zh-TW" sz="2701" dirty="0">
                   <a:latin typeface="Times New Roman" panose="02020603050405020304" pitchFamily="18" charset="0"/>
                   <a:cs typeface="Times New Roman" panose="02020603050405020304" pitchFamily="18" charset="0"/>
                 </a:rPr>
                 <a:t>BXs</a:t>
               </a:r>
-              <a:endParaRPr lang="zh-TW" altLang="en-US" sz="2400" dirty="0">
+              <a:endParaRPr lang="zh-TW" altLang="en-US" sz="2701" dirty="0">
                 <a:latin typeface="Times New Roman" panose="02020603050405020304" pitchFamily="18" charset="0"/>
                 <a:cs typeface="Times New Roman" panose="02020603050405020304" pitchFamily="18" charset="0"/>
               </a:endParaRPr>
@@ -3618,7 +3618,7 @@
             <a:lstStyle/>
             <a:p>
               <a:pPr algn="ctr"/>
-              <a:endParaRPr lang="zh-TW" altLang="en-US"/>
+              <a:endParaRPr lang="zh-TW" altLang="en-US" sz="1650"/>
             </a:p>
           </p:txBody>
         </p:sp>

--- a/Final/Figures/gray.pptx
+++ b/Final/Figures/gray.pptx
@@ -6,6 +6,7 @@
   </p:sldMasterIdLst>
   <p:sldIdLst>
     <p:sldId id="256" r:id="rId2"/>
+    <p:sldId id="257" r:id="rId3"/>
   </p:sldIdLst>
   <p:sldSz cx="9906000" cy="2519363"/>
   <p:notesSz cx="6858000" cy="9144000"/>
@@ -243,7 +244,7 @@
           <a:p>
             <a:fld id="{40ACB8D9-02A8-431F-86FB-1060DDC6D7B5}" type="datetimeFigureOut">
               <a:rPr lang="zh-TW" altLang="en-US" smtClean="0"/>
-              <a:t>2026/5/20</a:t>
+              <a:t>2026/7/18</a:t>
             </a:fld>
             <a:endParaRPr lang="zh-TW" altLang="en-US"/>
           </a:p>
@@ -413,7 +414,7 @@
           <a:p>
             <a:fld id="{40ACB8D9-02A8-431F-86FB-1060DDC6D7B5}" type="datetimeFigureOut">
               <a:rPr lang="zh-TW" altLang="en-US" smtClean="0"/>
-              <a:t>2026/5/20</a:t>
+              <a:t>2026/7/18</a:t>
             </a:fld>
             <a:endParaRPr lang="zh-TW" altLang="en-US"/>
           </a:p>
@@ -593,7 +594,7 @@
           <a:p>
             <a:fld id="{40ACB8D9-02A8-431F-86FB-1060DDC6D7B5}" type="datetimeFigureOut">
               <a:rPr lang="zh-TW" altLang="en-US" smtClean="0"/>
-              <a:t>2026/5/20</a:t>
+              <a:t>2026/7/18</a:t>
             </a:fld>
             <a:endParaRPr lang="zh-TW" altLang="en-US"/>
           </a:p>
@@ -763,7 +764,7 @@
           <a:p>
             <a:fld id="{40ACB8D9-02A8-431F-86FB-1060DDC6D7B5}" type="datetimeFigureOut">
               <a:rPr lang="zh-TW" altLang="en-US" smtClean="0"/>
-              <a:t>2026/5/20</a:t>
+              <a:t>2026/7/18</a:t>
             </a:fld>
             <a:endParaRPr lang="zh-TW" altLang="en-US"/>
           </a:p>
@@ -1009,7 +1010,7 @@
           <a:p>
             <a:fld id="{40ACB8D9-02A8-431F-86FB-1060DDC6D7B5}" type="datetimeFigureOut">
               <a:rPr lang="zh-TW" altLang="en-US" smtClean="0"/>
-              <a:t>2026/5/20</a:t>
+              <a:t>2026/7/18</a:t>
             </a:fld>
             <a:endParaRPr lang="zh-TW" altLang="en-US"/>
           </a:p>
@@ -1241,7 +1242,7 @@
           <a:p>
             <a:fld id="{40ACB8D9-02A8-431F-86FB-1060DDC6D7B5}" type="datetimeFigureOut">
               <a:rPr lang="zh-TW" altLang="en-US" smtClean="0"/>
-              <a:t>2026/5/20</a:t>
+              <a:t>2026/7/18</a:t>
             </a:fld>
             <a:endParaRPr lang="zh-TW" altLang="en-US"/>
           </a:p>
@@ -1608,7 +1609,7 @@
           <a:p>
             <a:fld id="{40ACB8D9-02A8-431F-86FB-1060DDC6D7B5}" type="datetimeFigureOut">
               <a:rPr lang="zh-TW" altLang="en-US" smtClean="0"/>
-              <a:t>2026/5/20</a:t>
+              <a:t>2026/7/18</a:t>
             </a:fld>
             <a:endParaRPr lang="zh-TW" altLang="en-US"/>
           </a:p>
@@ -1726,7 +1727,7 @@
           <a:p>
             <a:fld id="{40ACB8D9-02A8-431F-86FB-1060DDC6D7B5}" type="datetimeFigureOut">
               <a:rPr lang="zh-TW" altLang="en-US" smtClean="0"/>
-              <a:t>2026/5/20</a:t>
+              <a:t>2026/7/18</a:t>
             </a:fld>
             <a:endParaRPr lang="zh-TW" altLang="en-US"/>
           </a:p>
@@ -1821,7 +1822,7 @@
           <a:p>
             <a:fld id="{40ACB8D9-02A8-431F-86FB-1060DDC6D7B5}" type="datetimeFigureOut">
               <a:rPr lang="zh-TW" altLang="en-US" smtClean="0"/>
-              <a:t>2026/5/20</a:t>
+              <a:t>2026/7/18</a:t>
             </a:fld>
             <a:endParaRPr lang="zh-TW" altLang="en-US"/>
           </a:p>
@@ -2098,7 +2099,7 @@
           <a:p>
             <a:fld id="{40ACB8D9-02A8-431F-86FB-1060DDC6D7B5}" type="datetimeFigureOut">
               <a:rPr lang="zh-TW" altLang="en-US" smtClean="0"/>
-              <a:t>2026/5/20</a:t>
+              <a:t>2026/7/18</a:t>
             </a:fld>
             <a:endParaRPr lang="zh-TW" altLang="en-US"/>
           </a:p>
@@ -2355,7 +2356,7 @@
           <a:p>
             <a:fld id="{40ACB8D9-02A8-431F-86FB-1060DDC6D7B5}" type="datetimeFigureOut">
               <a:rPr lang="zh-TW" altLang="en-US" smtClean="0"/>
-              <a:t>2026/5/20</a:t>
+              <a:t>2026/7/18</a:t>
             </a:fld>
             <a:endParaRPr lang="zh-TW" altLang="en-US"/>
           </a:p>
@@ -2568,7 +2569,7 @@
           <a:p>
             <a:fld id="{40ACB8D9-02A8-431F-86FB-1060DDC6D7B5}" type="datetimeFigureOut">
               <a:rPr lang="zh-TW" altLang="en-US" smtClean="0"/>
-              <a:t>2026/5/20</a:t>
+              <a:t>2026/7/18</a:t>
             </a:fld>
             <a:endParaRPr lang="zh-TW" altLang="en-US"/>
           </a:p>
@@ -3008,9 +3009,9 @@
           <p:grpSpPr>
             <a:xfrm>
               <a:off x="3134985" y="427068"/>
-              <a:ext cx="4473574" cy="1523392"/>
+              <a:ext cx="4481882" cy="1523392"/>
               <a:chOff x="7839075" y="5334608"/>
-              <a:chExt cx="4473574" cy="1523392"/>
+              <a:chExt cx="4481882" cy="1523392"/>
             </a:xfrm>
           </p:grpSpPr>
           <p:pic>
@@ -3050,7 +3051,7 @@
             </p:blipFill>
             <p:spPr bwMode="auto">
               <a:xfrm>
-                <a:off x="8006750" y="5334608"/>
+                <a:off x="8015058" y="5334608"/>
                 <a:ext cx="4305899" cy="1523392"/>
               </a:xfrm>
               <a:prstGeom prst="rect">
@@ -3636,6 +3637,962 @@
 </p:sld>
 </file>
 
+<file path=ppt/slides/slide2.xml><?xml version="1.0" encoding="utf-8"?>
+<p:sld xmlns:a="http://schemas.openxmlformats.org/drawingml/2006/main" xmlns:r="http://schemas.openxmlformats.org/officeDocument/2006/relationships" xmlns:p="http://schemas.openxmlformats.org/presentationml/2006/main" show="0">
+  <p:cSld>
+    <p:spTree>
+      <p:nvGrpSpPr>
+        <p:cNvPr id="1" name=""/>
+        <p:cNvGrpSpPr/>
+        <p:nvPr/>
+      </p:nvGrpSpPr>
+      <p:grpSpPr>
+        <a:xfrm>
+          <a:off x="0" y="0"/>
+          <a:ext cx="0" cy="0"/>
+          <a:chOff x="0" y="0"/>
+          <a:chExt cx="0" cy="0"/>
+        </a:xfrm>
+      </p:grpSpPr>
+      <p:grpSp>
+        <p:nvGrpSpPr>
+          <p:cNvPr id="7" name="群組 6">
+            <a:extLst>
+              <a:ext uri="{FF2B5EF4-FFF2-40B4-BE49-F238E27FC236}">
+                <a16:creationId xmlns:a16="http://schemas.microsoft.com/office/drawing/2014/main" id="{1750CB8A-BB55-484B-9A3B-A762C4413338}"/>
+              </a:ext>
+            </a:extLst>
+          </p:cNvPr>
+          <p:cNvGrpSpPr/>
+          <p:nvPr/>
+        </p:nvGrpSpPr>
+        <p:grpSpPr>
+          <a:xfrm>
+            <a:off x="58290" y="92391"/>
+            <a:ext cx="9744677" cy="2276340"/>
+            <a:chOff x="58290" y="92391"/>
+            <a:chExt cx="9744677" cy="2276340"/>
+          </a:xfrm>
+        </p:grpSpPr>
+        <p:sp>
+          <p:nvSpPr>
+            <p:cNvPr id="43" name="矩形 42">
+              <a:extLst>
+                <a:ext uri="{FF2B5EF4-FFF2-40B4-BE49-F238E27FC236}">
+                  <a16:creationId xmlns:a16="http://schemas.microsoft.com/office/drawing/2014/main" id="{5DE5FE8D-F1A0-4363-92CE-186AC8C8AAF7}"/>
+                </a:ext>
+              </a:extLst>
+            </p:cNvPr>
+            <p:cNvSpPr/>
+            <p:nvPr/>
+          </p:nvSpPr>
+          <p:spPr>
+            <a:xfrm>
+              <a:off x="2700809" y="365096"/>
+              <a:ext cx="454310" cy="358206"/>
+            </a:xfrm>
+            <a:prstGeom prst="rect">
+              <a:avLst/>
+            </a:prstGeom>
+            <a:solidFill>
+              <a:schemeClr val="bg1"/>
+            </a:solidFill>
+            <a:ln>
+              <a:noFill/>
+            </a:ln>
+          </p:spPr>
+          <p:style>
+            <a:lnRef idx="2">
+              <a:schemeClr val="accent1">
+                <a:shade val="50000"/>
+              </a:schemeClr>
+            </a:lnRef>
+            <a:fillRef idx="1">
+              <a:schemeClr val="accent1"/>
+            </a:fillRef>
+            <a:effectRef idx="0">
+              <a:schemeClr val="accent1"/>
+            </a:effectRef>
+            <a:fontRef idx="minor">
+              <a:schemeClr val="lt1"/>
+            </a:fontRef>
+          </p:style>
+          <p:txBody>
+            <a:bodyPr rot="0" spcFirstLastPara="0" vertOverflow="overflow" horzOverflow="overflow" vert="horz" wrap="square" lIns="83873" tIns="41935" rIns="83873" bIns="41935" numCol="1" spcCol="0" rtlCol="0" fromWordArt="0" anchor="ctr" anchorCtr="0" forceAA="0" compatLnSpc="1">
+              <a:prstTxWarp prst="textNoShape">
+                <a:avLst/>
+              </a:prstTxWarp>
+              <a:noAutofit/>
+            </a:bodyPr>
+            <a:lstStyle/>
+            <a:p>
+              <a:pPr algn="ctr"/>
+              <a:endParaRPr lang="zh-TW" altLang="en-US" sz="1650"/>
+            </a:p>
+          </p:txBody>
+        </p:sp>
+        <p:sp>
+          <p:nvSpPr>
+            <p:cNvPr id="45" name="矩形 44">
+              <a:extLst>
+                <a:ext uri="{FF2B5EF4-FFF2-40B4-BE49-F238E27FC236}">
+                  <a16:creationId xmlns:a16="http://schemas.microsoft.com/office/drawing/2014/main" id="{C8B29744-6F31-4605-91B2-BEE9778DEC79}"/>
+                </a:ext>
+              </a:extLst>
+            </p:cNvPr>
+            <p:cNvSpPr/>
+            <p:nvPr/>
+          </p:nvSpPr>
+          <p:spPr>
+            <a:xfrm>
+              <a:off x="3031649" y="330708"/>
+              <a:ext cx="479412" cy="499422"/>
+            </a:xfrm>
+            <a:prstGeom prst="rect">
+              <a:avLst/>
+            </a:prstGeom>
+            <a:solidFill>
+              <a:schemeClr val="bg1"/>
+            </a:solidFill>
+            <a:ln>
+              <a:noFill/>
+            </a:ln>
+          </p:spPr>
+          <p:style>
+            <a:lnRef idx="2">
+              <a:schemeClr val="accent1">
+                <a:shade val="50000"/>
+              </a:schemeClr>
+            </a:lnRef>
+            <a:fillRef idx="1">
+              <a:schemeClr val="accent1"/>
+            </a:fillRef>
+            <a:effectRef idx="0">
+              <a:schemeClr val="accent1"/>
+            </a:effectRef>
+            <a:fontRef idx="minor">
+              <a:schemeClr val="lt1"/>
+            </a:fontRef>
+          </p:style>
+          <p:txBody>
+            <a:bodyPr rtlCol="0" anchor="ctr"/>
+            <a:lstStyle/>
+            <a:p>
+              <a:pPr algn="ctr"/>
+              <a:endParaRPr lang="zh-TW" altLang="en-US" sz="1650"/>
+            </a:p>
+          </p:txBody>
+        </p:sp>
+        <p:grpSp>
+          <p:nvGrpSpPr>
+            <p:cNvPr id="3" name="群組 2">
+              <a:extLst>
+                <a:ext uri="{FF2B5EF4-FFF2-40B4-BE49-F238E27FC236}">
+                  <a16:creationId xmlns:a16="http://schemas.microsoft.com/office/drawing/2014/main" id="{79E2410E-8361-4829-8057-92AEAF88F352}"/>
+                </a:ext>
+              </a:extLst>
+            </p:cNvPr>
+            <p:cNvGrpSpPr/>
+            <p:nvPr/>
+          </p:nvGrpSpPr>
+          <p:grpSpPr>
+            <a:xfrm>
+              <a:off x="58290" y="93541"/>
+              <a:ext cx="3949553" cy="2274043"/>
+              <a:chOff x="7625750" y="0"/>
+              <a:chExt cx="4305899" cy="2479218"/>
+            </a:xfrm>
+          </p:grpSpPr>
+          <p:pic>
+            <p:nvPicPr>
+              <p:cNvPr id="1026" name="Picture 2" descr="Figure 1">
+                <a:extLst>
+                  <a:ext uri="{FF2B5EF4-FFF2-40B4-BE49-F238E27FC236}">
+                    <a16:creationId xmlns:a16="http://schemas.microsoft.com/office/drawing/2014/main" id="{8C6290E3-8B86-4B9F-9A96-6E741BE5872F}"/>
+                  </a:ext>
+                </a:extLst>
+              </p:cNvPr>
+              <p:cNvPicPr>
+                <a:picLocks noChangeAspect="1" noChangeArrowheads="1"/>
+              </p:cNvPicPr>
+              <p:nvPr/>
+            </p:nvPicPr>
+            <p:blipFill rotWithShape="1">
+              <a:blip r:embed="rId2">
+                <a:clrChange>
+                  <a:clrFrom>
+                    <a:srgbClr val="FFFFFF"/>
+                  </a:clrFrom>
+                  <a:clrTo>
+                    <a:srgbClr val="FFFFFF">
+                      <a:alpha val="0"/>
+                    </a:srgbClr>
+                  </a:clrTo>
+                </a:clrChange>
+                <a:extLst>
+                  <a:ext uri="{28A0092B-C50C-407E-A947-70E740481C1C}">
+                    <a14:useLocalDpi xmlns:a14="http://schemas.microsoft.com/office/drawing/2010/main" val="0"/>
+                  </a:ext>
+                </a:extLst>
+              </a:blip>
+              <a:srcRect l="63107" b="63849"/>
+              <a:stretch/>
+            </p:blipFill>
+            <p:spPr bwMode="auto">
+              <a:xfrm>
+                <a:off x="7625750" y="0"/>
+                <a:ext cx="4305899" cy="2479218"/>
+              </a:xfrm>
+              <a:prstGeom prst="rect">
+                <a:avLst/>
+              </a:prstGeom>
+              <a:noFill/>
+              <a:extLst>
+                <a:ext uri="{909E8E84-426E-40DD-AFC4-6F175D3DCCD1}">
+                  <a14:hiddenFill xmlns:a14="http://schemas.microsoft.com/office/drawing/2010/main">
+                    <a:solidFill>
+                      <a:srgbClr val="FFFFFF"/>
+                    </a:solidFill>
+                  </a14:hiddenFill>
+                </a:ext>
+              </a:extLst>
+            </p:spPr>
+          </p:pic>
+          <p:sp>
+            <p:nvSpPr>
+              <p:cNvPr id="2" name="矩形 1">
+                <a:extLst>
+                  <a:ext uri="{FF2B5EF4-FFF2-40B4-BE49-F238E27FC236}">
+                    <a16:creationId xmlns:a16="http://schemas.microsoft.com/office/drawing/2014/main" id="{CFB13C63-0209-4F4D-85DE-6D8F1E346E9F}"/>
+                  </a:ext>
+                </a:extLst>
+              </p:cNvPr>
+              <p:cNvSpPr/>
+              <p:nvPr/>
+            </p:nvSpPr>
+            <p:spPr>
+              <a:xfrm>
+                <a:off x="7905750" y="38100"/>
+                <a:ext cx="495300" cy="390525"/>
+              </a:xfrm>
+              <a:prstGeom prst="rect">
+                <a:avLst/>
+              </a:prstGeom>
+              <a:solidFill>
+                <a:schemeClr val="bg1"/>
+              </a:solidFill>
+              <a:ln>
+                <a:noFill/>
+              </a:ln>
+            </p:spPr>
+            <p:style>
+              <a:lnRef idx="2">
+                <a:schemeClr val="accent1">
+                  <a:shade val="50000"/>
+                </a:schemeClr>
+              </a:lnRef>
+              <a:fillRef idx="1">
+                <a:schemeClr val="accent1"/>
+              </a:fillRef>
+              <a:effectRef idx="0">
+                <a:schemeClr val="accent1"/>
+              </a:effectRef>
+              <a:fontRef idx="minor">
+                <a:schemeClr val="lt1"/>
+              </a:fontRef>
+            </p:style>
+            <p:txBody>
+              <a:bodyPr rot="0" spcFirstLastPara="0" vertOverflow="overflow" horzOverflow="overflow" vert="horz" wrap="square" lIns="83873" tIns="41935" rIns="83873" bIns="41935" numCol="1" spcCol="0" rtlCol="0" fromWordArt="0" anchor="ctr" anchorCtr="0" forceAA="0" compatLnSpc="1">
+                <a:prstTxWarp prst="textNoShape">
+                  <a:avLst/>
+                </a:prstTxWarp>
+                <a:noAutofit/>
+              </a:bodyPr>
+              <a:lstStyle/>
+              <a:p>
+                <a:pPr algn="ctr"/>
+                <a:endParaRPr lang="zh-TW" altLang="en-US" sz="1650" dirty="0"/>
+              </a:p>
+            </p:txBody>
+          </p:sp>
+        </p:grpSp>
+        <p:sp>
+          <p:nvSpPr>
+            <p:cNvPr id="5" name="文字方塊 4">
+              <a:extLst>
+                <a:ext uri="{FF2B5EF4-FFF2-40B4-BE49-F238E27FC236}">
+                  <a16:creationId xmlns:a16="http://schemas.microsoft.com/office/drawing/2014/main" id="{C8D4747B-997D-40F1-9B90-EAD60C21C202}"/>
+                </a:ext>
+              </a:extLst>
+            </p:cNvPr>
+            <p:cNvSpPr txBox="1"/>
+            <p:nvPr/>
+          </p:nvSpPr>
+          <p:spPr>
+            <a:xfrm>
+              <a:off x="1650153" y="558359"/>
+              <a:ext cx="869306" cy="507960"/>
+            </a:xfrm>
+            <a:prstGeom prst="rect">
+              <a:avLst/>
+            </a:prstGeom>
+            <a:noFill/>
+          </p:spPr>
+          <p:txBody>
+            <a:bodyPr wrap="square" rtlCol="0">
+              <a:spAutoFit/>
+            </a:bodyPr>
+            <a:lstStyle/>
+            <a:p>
+              <a:r>
+                <a:rPr lang="en-US" altLang="zh-TW" sz="2701" dirty="0">
+                  <a:latin typeface="Times New Roman" panose="02020603050405020304" pitchFamily="18" charset="0"/>
+                  <a:cs typeface="Times New Roman" panose="02020603050405020304" pitchFamily="18" charset="0"/>
+                </a:rPr>
+                <a:t>BXs</a:t>
+              </a:r>
+              <a:endParaRPr lang="zh-TW" altLang="en-US" sz="2701" dirty="0">
+                <a:latin typeface="Times New Roman" panose="02020603050405020304" pitchFamily="18" charset="0"/>
+                <a:cs typeface="Times New Roman" panose="02020603050405020304" pitchFamily="18" charset="0"/>
+              </a:endParaRPr>
+            </a:p>
+          </p:txBody>
+        </p:sp>
+        <p:grpSp>
+          <p:nvGrpSpPr>
+            <p:cNvPr id="6" name="群組 5">
+              <a:extLst>
+                <a:ext uri="{FF2B5EF4-FFF2-40B4-BE49-F238E27FC236}">
+                  <a16:creationId xmlns:a16="http://schemas.microsoft.com/office/drawing/2014/main" id="{6C23D4E1-20EC-43B5-AD41-9553EBB3CFF2}"/>
+                </a:ext>
+              </a:extLst>
+            </p:cNvPr>
+            <p:cNvGrpSpPr/>
+            <p:nvPr/>
+          </p:nvGrpSpPr>
+          <p:grpSpPr>
+            <a:xfrm>
+              <a:off x="3886563" y="92392"/>
+              <a:ext cx="2847724" cy="2276339"/>
+              <a:chOff x="3886563" y="92392"/>
+              <a:chExt cx="2847724" cy="2276339"/>
+            </a:xfrm>
+          </p:grpSpPr>
+          <p:grpSp>
+            <p:nvGrpSpPr>
+              <p:cNvPr id="4" name="群組 3">
+                <a:extLst>
+                  <a:ext uri="{FF2B5EF4-FFF2-40B4-BE49-F238E27FC236}">
+                    <a16:creationId xmlns:a16="http://schemas.microsoft.com/office/drawing/2014/main" id="{1113E06E-D233-45E4-A623-8DD3B6468456}"/>
+                  </a:ext>
+                </a:extLst>
+              </p:cNvPr>
+              <p:cNvGrpSpPr/>
+              <p:nvPr/>
+            </p:nvGrpSpPr>
+            <p:grpSpPr>
+              <a:xfrm>
+                <a:off x="3886563" y="93540"/>
+                <a:ext cx="1485209" cy="2275191"/>
+                <a:chOff x="3886563" y="93540"/>
+                <a:chExt cx="1485209" cy="2275191"/>
+              </a:xfrm>
+            </p:grpSpPr>
+            <p:pic>
+              <p:nvPicPr>
+                <p:cNvPr id="17" name="Picture 2" descr="Figure 1">
+                  <a:extLst>
+                    <a:ext uri="{FF2B5EF4-FFF2-40B4-BE49-F238E27FC236}">
+                      <a16:creationId xmlns:a16="http://schemas.microsoft.com/office/drawing/2014/main" id="{CF7E2544-7924-4D32-94BE-87D3EA09A0D2}"/>
+                    </a:ext>
+                  </a:extLst>
+                </p:cNvPr>
+                <p:cNvPicPr>
+                  <a:picLocks noChangeAspect="1" noChangeArrowheads="1"/>
+                </p:cNvPicPr>
+                <p:nvPr/>
+              </p:nvPicPr>
+              <p:blipFill rotWithShape="1">
+                <a:blip r:embed="rId2">
+                  <a:clrChange>
+                    <a:clrFrom>
+                      <a:srgbClr val="FFFFFF"/>
+                    </a:clrFrom>
+                    <a:clrTo>
+                      <a:srgbClr val="FFFFFF">
+                        <a:alpha val="0"/>
+                      </a:srgbClr>
+                    </a:clrTo>
+                  </a:clrChange>
+                  <a:extLst>
+                    <a:ext uri="{28A0092B-C50C-407E-A947-70E740481C1C}">
+                      <a14:useLocalDpi xmlns:a14="http://schemas.microsoft.com/office/drawing/2010/main" val="0"/>
+                    </a:ext>
+                  </a:extLst>
+                </a:blip>
+                <a:srcRect l="92498" b="63849"/>
+                <a:stretch/>
+              </p:blipFill>
+              <p:spPr bwMode="auto">
+                <a:xfrm>
+                  <a:off x="3886563" y="94688"/>
+                  <a:ext cx="803088" cy="2274043"/>
+                </a:xfrm>
+                <a:prstGeom prst="rect">
+                  <a:avLst/>
+                </a:prstGeom>
+                <a:noFill/>
+                <a:extLst>
+                  <a:ext uri="{909E8E84-426E-40DD-AFC4-6F175D3DCCD1}">
+                    <a14:hiddenFill xmlns:a14="http://schemas.microsoft.com/office/drawing/2010/main">
+                      <a:solidFill>
+                        <a:srgbClr val="FFFFFF"/>
+                      </a:solidFill>
+                    </a14:hiddenFill>
+                  </a:ext>
+                </a:extLst>
+              </p:spPr>
+            </p:pic>
+            <p:pic>
+              <p:nvPicPr>
+                <p:cNvPr id="18" name="Picture 2" descr="Figure 1">
+                  <a:extLst>
+                    <a:ext uri="{FF2B5EF4-FFF2-40B4-BE49-F238E27FC236}">
+                      <a16:creationId xmlns:a16="http://schemas.microsoft.com/office/drawing/2014/main" id="{C5575598-D848-42B7-830E-444D9208B167}"/>
+                    </a:ext>
+                  </a:extLst>
+                </p:cNvPr>
+                <p:cNvPicPr>
+                  <a:picLocks noChangeAspect="1" noChangeArrowheads="1"/>
+                </p:cNvPicPr>
+                <p:nvPr/>
+              </p:nvPicPr>
+              <p:blipFill rotWithShape="1">
+                <a:blip r:embed="rId2">
+                  <a:clrChange>
+                    <a:clrFrom>
+                      <a:srgbClr val="FFFFFF"/>
+                    </a:clrFrom>
+                    <a:clrTo>
+                      <a:srgbClr val="FFFFFF">
+                        <a:alpha val="0"/>
+                      </a:srgbClr>
+                    </a:clrTo>
+                  </a:clrChange>
+                  <a:extLst>
+                    <a:ext uri="{28A0092B-C50C-407E-A947-70E740481C1C}">
+                      <a14:useLocalDpi xmlns:a14="http://schemas.microsoft.com/office/drawing/2010/main" val="0"/>
+                    </a:ext>
+                  </a:extLst>
+                </a:blip>
+                <a:srcRect l="92498" b="63849"/>
+                <a:stretch/>
+              </p:blipFill>
+              <p:spPr bwMode="auto">
+                <a:xfrm>
+                  <a:off x="4568684" y="93540"/>
+                  <a:ext cx="803088" cy="2274043"/>
+                </a:xfrm>
+                <a:prstGeom prst="rect">
+                  <a:avLst/>
+                </a:prstGeom>
+                <a:noFill/>
+                <a:extLst>
+                  <a:ext uri="{909E8E84-426E-40DD-AFC4-6F175D3DCCD1}">
+                    <a14:hiddenFill xmlns:a14="http://schemas.microsoft.com/office/drawing/2010/main">
+                      <a:solidFill>
+                        <a:srgbClr val="FFFFFF"/>
+                      </a:solidFill>
+                    </a14:hiddenFill>
+                  </a:ext>
+                </a:extLst>
+              </p:spPr>
+            </p:pic>
+          </p:grpSp>
+          <p:grpSp>
+            <p:nvGrpSpPr>
+              <p:cNvPr id="20" name="群組 19">
+                <a:extLst>
+                  <a:ext uri="{FF2B5EF4-FFF2-40B4-BE49-F238E27FC236}">
+                    <a16:creationId xmlns:a16="http://schemas.microsoft.com/office/drawing/2014/main" id="{2268FD7A-3F17-456D-A961-277DF4F3392B}"/>
+                  </a:ext>
+                </a:extLst>
+              </p:cNvPr>
+              <p:cNvGrpSpPr/>
+              <p:nvPr/>
+            </p:nvGrpSpPr>
+            <p:grpSpPr>
+              <a:xfrm>
+                <a:off x="5249078" y="92392"/>
+                <a:ext cx="1485209" cy="2275191"/>
+                <a:chOff x="3886563" y="93540"/>
+                <a:chExt cx="1485209" cy="2275191"/>
+              </a:xfrm>
+            </p:grpSpPr>
+            <p:pic>
+              <p:nvPicPr>
+                <p:cNvPr id="21" name="Picture 2" descr="Figure 1">
+                  <a:extLst>
+                    <a:ext uri="{FF2B5EF4-FFF2-40B4-BE49-F238E27FC236}">
+                      <a16:creationId xmlns:a16="http://schemas.microsoft.com/office/drawing/2014/main" id="{6C0281EC-71DB-4F06-97F0-D7DB09235428}"/>
+                    </a:ext>
+                  </a:extLst>
+                </p:cNvPr>
+                <p:cNvPicPr>
+                  <a:picLocks noChangeAspect="1" noChangeArrowheads="1"/>
+                </p:cNvPicPr>
+                <p:nvPr/>
+              </p:nvPicPr>
+              <p:blipFill rotWithShape="1">
+                <a:blip r:embed="rId2">
+                  <a:clrChange>
+                    <a:clrFrom>
+                      <a:srgbClr val="FFFFFF"/>
+                    </a:clrFrom>
+                    <a:clrTo>
+                      <a:srgbClr val="FFFFFF">
+                        <a:alpha val="0"/>
+                      </a:srgbClr>
+                    </a:clrTo>
+                  </a:clrChange>
+                  <a:extLst>
+                    <a:ext uri="{28A0092B-C50C-407E-A947-70E740481C1C}">
+                      <a14:useLocalDpi xmlns:a14="http://schemas.microsoft.com/office/drawing/2010/main" val="0"/>
+                    </a:ext>
+                  </a:extLst>
+                </a:blip>
+                <a:srcRect l="92498" b="63849"/>
+                <a:stretch/>
+              </p:blipFill>
+              <p:spPr bwMode="auto">
+                <a:xfrm>
+                  <a:off x="3886563" y="94688"/>
+                  <a:ext cx="803088" cy="2274043"/>
+                </a:xfrm>
+                <a:prstGeom prst="rect">
+                  <a:avLst/>
+                </a:prstGeom>
+                <a:noFill/>
+                <a:extLst>
+                  <a:ext uri="{909E8E84-426E-40DD-AFC4-6F175D3DCCD1}">
+                    <a14:hiddenFill xmlns:a14="http://schemas.microsoft.com/office/drawing/2010/main">
+                      <a:solidFill>
+                        <a:srgbClr val="FFFFFF"/>
+                      </a:solidFill>
+                    </a14:hiddenFill>
+                  </a:ext>
+                </a:extLst>
+              </p:spPr>
+            </p:pic>
+            <p:pic>
+              <p:nvPicPr>
+                <p:cNvPr id="22" name="Picture 2" descr="Figure 1">
+                  <a:extLst>
+                    <a:ext uri="{FF2B5EF4-FFF2-40B4-BE49-F238E27FC236}">
+                      <a16:creationId xmlns:a16="http://schemas.microsoft.com/office/drawing/2014/main" id="{01F11B97-D40E-4AB2-8D2D-DDBFA6CABF4C}"/>
+                    </a:ext>
+                  </a:extLst>
+                </p:cNvPr>
+                <p:cNvPicPr>
+                  <a:picLocks noChangeAspect="1" noChangeArrowheads="1"/>
+                </p:cNvPicPr>
+                <p:nvPr/>
+              </p:nvPicPr>
+              <p:blipFill rotWithShape="1">
+                <a:blip r:embed="rId2">
+                  <a:clrChange>
+                    <a:clrFrom>
+                      <a:srgbClr val="FFFFFF"/>
+                    </a:clrFrom>
+                    <a:clrTo>
+                      <a:srgbClr val="FFFFFF">
+                        <a:alpha val="0"/>
+                      </a:srgbClr>
+                    </a:clrTo>
+                  </a:clrChange>
+                  <a:extLst>
+                    <a:ext uri="{28A0092B-C50C-407E-A947-70E740481C1C}">
+                      <a14:useLocalDpi xmlns:a14="http://schemas.microsoft.com/office/drawing/2010/main" val="0"/>
+                    </a:ext>
+                  </a:extLst>
+                </a:blip>
+                <a:srcRect l="92498" b="63849"/>
+                <a:stretch/>
+              </p:blipFill>
+              <p:spPr bwMode="auto">
+                <a:xfrm>
+                  <a:off x="4568684" y="93540"/>
+                  <a:ext cx="803088" cy="2274043"/>
+                </a:xfrm>
+                <a:prstGeom prst="rect">
+                  <a:avLst/>
+                </a:prstGeom>
+                <a:noFill/>
+                <a:extLst>
+                  <a:ext uri="{909E8E84-426E-40DD-AFC4-6F175D3DCCD1}">
+                    <a14:hiddenFill xmlns:a14="http://schemas.microsoft.com/office/drawing/2010/main">
+                      <a:solidFill>
+                        <a:srgbClr val="FFFFFF"/>
+                      </a:solidFill>
+                    </a14:hiddenFill>
+                  </a:ext>
+                </a:extLst>
+              </p:spPr>
+            </p:pic>
+          </p:grpSp>
+        </p:grpSp>
+        <p:grpSp>
+          <p:nvGrpSpPr>
+            <p:cNvPr id="24" name="群組 23">
+              <a:extLst>
+                <a:ext uri="{FF2B5EF4-FFF2-40B4-BE49-F238E27FC236}">
+                  <a16:creationId xmlns:a16="http://schemas.microsoft.com/office/drawing/2014/main" id="{A04E0A83-7E47-498C-9598-111E0CFBF60F}"/>
+                </a:ext>
+              </a:extLst>
+            </p:cNvPr>
+            <p:cNvGrpSpPr/>
+            <p:nvPr/>
+          </p:nvGrpSpPr>
+          <p:grpSpPr>
+            <a:xfrm>
+              <a:off x="6611260" y="92392"/>
+              <a:ext cx="2847724" cy="2276339"/>
+              <a:chOff x="3886563" y="92392"/>
+              <a:chExt cx="2847724" cy="2276339"/>
+            </a:xfrm>
+          </p:grpSpPr>
+          <p:grpSp>
+            <p:nvGrpSpPr>
+              <p:cNvPr id="25" name="群組 24">
+                <a:extLst>
+                  <a:ext uri="{FF2B5EF4-FFF2-40B4-BE49-F238E27FC236}">
+                    <a16:creationId xmlns:a16="http://schemas.microsoft.com/office/drawing/2014/main" id="{86E882C0-B0A9-40ED-96FD-63E951EF082F}"/>
+                  </a:ext>
+                </a:extLst>
+              </p:cNvPr>
+              <p:cNvGrpSpPr/>
+              <p:nvPr/>
+            </p:nvGrpSpPr>
+            <p:grpSpPr>
+              <a:xfrm>
+                <a:off x="3886563" y="93540"/>
+                <a:ext cx="1485209" cy="2275191"/>
+                <a:chOff x="3886563" y="93540"/>
+                <a:chExt cx="1485209" cy="2275191"/>
+              </a:xfrm>
+            </p:grpSpPr>
+            <p:pic>
+              <p:nvPicPr>
+                <p:cNvPr id="32" name="Picture 2" descr="Figure 1">
+                  <a:extLst>
+                    <a:ext uri="{FF2B5EF4-FFF2-40B4-BE49-F238E27FC236}">
+                      <a16:creationId xmlns:a16="http://schemas.microsoft.com/office/drawing/2014/main" id="{94166E62-03DD-4C45-B9E6-BE31D8F88E62}"/>
+                    </a:ext>
+                  </a:extLst>
+                </p:cNvPr>
+                <p:cNvPicPr>
+                  <a:picLocks noChangeAspect="1" noChangeArrowheads="1"/>
+                </p:cNvPicPr>
+                <p:nvPr/>
+              </p:nvPicPr>
+              <p:blipFill rotWithShape="1">
+                <a:blip r:embed="rId2">
+                  <a:clrChange>
+                    <a:clrFrom>
+                      <a:srgbClr val="FFFFFF"/>
+                    </a:clrFrom>
+                    <a:clrTo>
+                      <a:srgbClr val="FFFFFF">
+                        <a:alpha val="0"/>
+                      </a:srgbClr>
+                    </a:clrTo>
+                  </a:clrChange>
+                  <a:extLst>
+                    <a:ext uri="{28A0092B-C50C-407E-A947-70E740481C1C}">
+                      <a14:useLocalDpi xmlns:a14="http://schemas.microsoft.com/office/drawing/2010/main" val="0"/>
+                    </a:ext>
+                  </a:extLst>
+                </a:blip>
+                <a:srcRect l="92498" b="63849"/>
+                <a:stretch/>
+              </p:blipFill>
+              <p:spPr bwMode="auto">
+                <a:xfrm>
+                  <a:off x="3886563" y="94688"/>
+                  <a:ext cx="803088" cy="2274043"/>
+                </a:xfrm>
+                <a:prstGeom prst="rect">
+                  <a:avLst/>
+                </a:prstGeom>
+                <a:noFill/>
+                <a:extLst>
+                  <a:ext uri="{909E8E84-426E-40DD-AFC4-6F175D3DCCD1}">
+                    <a14:hiddenFill xmlns:a14="http://schemas.microsoft.com/office/drawing/2010/main">
+                      <a:solidFill>
+                        <a:srgbClr val="FFFFFF"/>
+                      </a:solidFill>
+                    </a14:hiddenFill>
+                  </a:ext>
+                </a:extLst>
+              </p:spPr>
+            </p:pic>
+            <p:pic>
+              <p:nvPicPr>
+                <p:cNvPr id="34" name="Picture 2" descr="Figure 1">
+                  <a:extLst>
+                    <a:ext uri="{FF2B5EF4-FFF2-40B4-BE49-F238E27FC236}">
+                      <a16:creationId xmlns:a16="http://schemas.microsoft.com/office/drawing/2014/main" id="{2D5FE5F7-EC46-47C4-96B0-58682BBAF2D7}"/>
+                    </a:ext>
+                  </a:extLst>
+                </p:cNvPr>
+                <p:cNvPicPr>
+                  <a:picLocks noChangeAspect="1" noChangeArrowheads="1"/>
+                </p:cNvPicPr>
+                <p:nvPr/>
+              </p:nvPicPr>
+              <p:blipFill rotWithShape="1">
+                <a:blip r:embed="rId2">
+                  <a:clrChange>
+                    <a:clrFrom>
+                      <a:srgbClr val="FFFFFF"/>
+                    </a:clrFrom>
+                    <a:clrTo>
+                      <a:srgbClr val="FFFFFF">
+                        <a:alpha val="0"/>
+                      </a:srgbClr>
+                    </a:clrTo>
+                  </a:clrChange>
+                  <a:extLst>
+                    <a:ext uri="{28A0092B-C50C-407E-A947-70E740481C1C}">
+                      <a14:useLocalDpi xmlns:a14="http://schemas.microsoft.com/office/drawing/2010/main" val="0"/>
+                    </a:ext>
+                  </a:extLst>
+                </a:blip>
+                <a:srcRect l="92498" b="63849"/>
+                <a:stretch/>
+              </p:blipFill>
+              <p:spPr bwMode="auto">
+                <a:xfrm>
+                  <a:off x="4568684" y="93540"/>
+                  <a:ext cx="803088" cy="2274043"/>
+                </a:xfrm>
+                <a:prstGeom prst="rect">
+                  <a:avLst/>
+                </a:prstGeom>
+                <a:noFill/>
+                <a:extLst>
+                  <a:ext uri="{909E8E84-426E-40DD-AFC4-6F175D3DCCD1}">
+                    <a14:hiddenFill xmlns:a14="http://schemas.microsoft.com/office/drawing/2010/main">
+                      <a:solidFill>
+                        <a:srgbClr val="FFFFFF"/>
+                      </a:solidFill>
+                    </a14:hiddenFill>
+                  </a:ext>
+                </a:extLst>
+              </p:spPr>
+            </p:pic>
+          </p:grpSp>
+          <p:grpSp>
+            <p:nvGrpSpPr>
+              <p:cNvPr id="26" name="群組 25">
+                <a:extLst>
+                  <a:ext uri="{FF2B5EF4-FFF2-40B4-BE49-F238E27FC236}">
+                    <a16:creationId xmlns:a16="http://schemas.microsoft.com/office/drawing/2014/main" id="{710D5D31-3608-4292-B04F-3D8BA283C91E}"/>
+                  </a:ext>
+                </a:extLst>
+              </p:cNvPr>
+              <p:cNvGrpSpPr/>
+              <p:nvPr/>
+            </p:nvGrpSpPr>
+            <p:grpSpPr>
+              <a:xfrm>
+                <a:off x="5249078" y="92392"/>
+                <a:ext cx="1485209" cy="2275191"/>
+                <a:chOff x="3886563" y="93540"/>
+                <a:chExt cx="1485209" cy="2275191"/>
+              </a:xfrm>
+            </p:grpSpPr>
+            <p:pic>
+              <p:nvPicPr>
+                <p:cNvPr id="28" name="Picture 2" descr="Figure 1">
+                  <a:extLst>
+                    <a:ext uri="{FF2B5EF4-FFF2-40B4-BE49-F238E27FC236}">
+                      <a16:creationId xmlns:a16="http://schemas.microsoft.com/office/drawing/2014/main" id="{188F9159-6052-4473-894D-4B6B7686BEF1}"/>
+                    </a:ext>
+                  </a:extLst>
+                </p:cNvPr>
+                <p:cNvPicPr>
+                  <a:picLocks noChangeAspect="1" noChangeArrowheads="1"/>
+                </p:cNvPicPr>
+                <p:nvPr/>
+              </p:nvPicPr>
+              <p:blipFill rotWithShape="1">
+                <a:blip r:embed="rId2">
+                  <a:clrChange>
+                    <a:clrFrom>
+                      <a:srgbClr val="FFFFFF"/>
+                    </a:clrFrom>
+                    <a:clrTo>
+                      <a:srgbClr val="FFFFFF">
+                        <a:alpha val="0"/>
+                      </a:srgbClr>
+                    </a:clrTo>
+                  </a:clrChange>
+                  <a:extLst>
+                    <a:ext uri="{28A0092B-C50C-407E-A947-70E740481C1C}">
+                      <a14:useLocalDpi xmlns:a14="http://schemas.microsoft.com/office/drawing/2010/main" val="0"/>
+                    </a:ext>
+                  </a:extLst>
+                </a:blip>
+                <a:srcRect l="92498" b="63849"/>
+                <a:stretch/>
+              </p:blipFill>
+              <p:spPr bwMode="auto">
+                <a:xfrm>
+                  <a:off x="3886563" y="94688"/>
+                  <a:ext cx="803088" cy="2274043"/>
+                </a:xfrm>
+                <a:prstGeom prst="rect">
+                  <a:avLst/>
+                </a:prstGeom>
+                <a:noFill/>
+                <a:extLst>
+                  <a:ext uri="{909E8E84-426E-40DD-AFC4-6F175D3DCCD1}">
+                    <a14:hiddenFill xmlns:a14="http://schemas.microsoft.com/office/drawing/2010/main">
+                      <a:solidFill>
+                        <a:srgbClr val="FFFFFF"/>
+                      </a:solidFill>
+                    </a14:hiddenFill>
+                  </a:ext>
+                </a:extLst>
+              </p:spPr>
+            </p:pic>
+            <p:pic>
+              <p:nvPicPr>
+                <p:cNvPr id="30" name="Picture 2" descr="Figure 1">
+                  <a:extLst>
+                    <a:ext uri="{FF2B5EF4-FFF2-40B4-BE49-F238E27FC236}">
+                      <a16:creationId xmlns:a16="http://schemas.microsoft.com/office/drawing/2014/main" id="{2E69F8FF-48C2-4895-B24C-B43756B0B5A6}"/>
+                    </a:ext>
+                  </a:extLst>
+                </p:cNvPr>
+                <p:cNvPicPr>
+                  <a:picLocks noChangeAspect="1" noChangeArrowheads="1"/>
+                </p:cNvPicPr>
+                <p:nvPr/>
+              </p:nvPicPr>
+              <p:blipFill rotWithShape="1">
+                <a:blip r:embed="rId2">
+                  <a:clrChange>
+                    <a:clrFrom>
+                      <a:srgbClr val="FFFFFF"/>
+                    </a:clrFrom>
+                    <a:clrTo>
+                      <a:srgbClr val="FFFFFF">
+                        <a:alpha val="0"/>
+                      </a:srgbClr>
+                    </a:clrTo>
+                  </a:clrChange>
+                  <a:extLst>
+                    <a:ext uri="{28A0092B-C50C-407E-A947-70E740481C1C}">
+                      <a14:useLocalDpi xmlns:a14="http://schemas.microsoft.com/office/drawing/2010/main" val="0"/>
+                    </a:ext>
+                  </a:extLst>
+                </a:blip>
+                <a:srcRect l="92498" b="63849"/>
+                <a:stretch/>
+              </p:blipFill>
+              <p:spPr bwMode="auto">
+                <a:xfrm>
+                  <a:off x="4568684" y="93540"/>
+                  <a:ext cx="803088" cy="2274043"/>
+                </a:xfrm>
+                <a:prstGeom prst="rect">
+                  <a:avLst/>
+                </a:prstGeom>
+                <a:noFill/>
+                <a:extLst>
+                  <a:ext uri="{909E8E84-426E-40DD-AFC4-6F175D3DCCD1}">
+                    <a14:hiddenFill xmlns:a14="http://schemas.microsoft.com/office/drawing/2010/main">
+                      <a:solidFill>
+                        <a:srgbClr val="FFFFFF"/>
+                      </a:solidFill>
+                    </a14:hiddenFill>
+                  </a:ext>
+                </a:extLst>
+              </p:spPr>
+            </p:pic>
+          </p:grpSp>
+        </p:grpSp>
+        <p:pic>
+          <p:nvPicPr>
+            <p:cNvPr id="35" name="Picture 2" descr="Figure 1">
+              <a:extLst>
+                <a:ext uri="{FF2B5EF4-FFF2-40B4-BE49-F238E27FC236}">
+                  <a16:creationId xmlns:a16="http://schemas.microsoft.com/office/drawing/2014/main" id="{E2912C24-5F81-4355-BBA4-1056D295BD12}"/>
+                </a:ext>
+              </a:extLst>
+            </p:cNvPr>
+            <p:cNvPicPr>
+              <a:picLocks noChangeAspect="1" noChangeArrowheads="1"/>
+            </p:cNvPicPr>
+            <p:nvPr/>
+          </p:nvPicPr>
+          <p:blipFill rotWithShape="1">
+            <a:blip r:embed="rId2">
+              <a:clrChange>
+                <a:clrFrom>
+                  <a:srgbClr val="FFFFFF"/>
+                </a:clrFrom>
+                <a:clrTo>
+                  <a:srgbClr val="FFFFFF">
+                    <a:alpha val="0"/>
+                  </a:srgbClr>
+                </a:clrTo>
+              </a:clrChange>
+              <a:extLst>
+                <a:ext uri="{28A0092B-C50C-407E-A947-70E740481C1C}">
+                  <a14:useLocalDpi xmlns:a14="http://schemas.microsoft.com/office/drawing/2010/main" val="0"/>
+                </a:ext>
+              </a:extLst>
+            </a:blip>
+            <a:srcRect l="92498" b="63849"/>
+            <a:stretch/>
+          </p:blipFill>
+          <p:spPr bwMode="auto">
+            <a:xfrm>
+              <a:off x="8999879" y="92391"/>
+              <a:ext cx="803088" cy="2274043"/>
+            </a:xfrm>
+            <a:prstGeom prst="rect">
+              <a:avLst/>
+            </a:prstGeom>
+            <a:noFill/>
+            <a:extLst>
+              <a:ext uri="{909E8E84-426E-40DD-AFC4-6F175D3DCCD1}">
+                <a14:hiddenFill xmlns:a14="http://schemas.microsoft.com/office/drawing/2010/main">
+                  <a:solidFill>
+                    <a:srgbClr val="FFFFFF"/>
+                  </a:solidFill>
+                </a14:hiddenFill>
+              </a:ext>
+            </a:extLst>
+          </p:spPr>
+        </p:pic>
+      </p:grpSp>
+    </p:spTree>
+    <p:extLst>
+      <p:ext uri="{BB962C8B-B14F-4D97-AF65-F5344CB8AC3E}">
+        <p14:creationId xmlns:p14="http://schemas.microsoft.com/office/powerpoint/2010/main" val="1066313764"/>
+      </p:ext>
+    </p:extLst>
+  </p:cSld>
+  <p:clrMapOvr>
+    <a:masterClrMapping/>
+  </p:clrMapOvr>
+</p:sld>
+</file>
+
 <file path=ppt/theme/theme1.xml><?xml version="1.0" encoding="utf-8"?>
 <a:theme xmlns:a="http://schemas.openxmlformats.org/drawingml/2006/main" name="Office 佈景主題">
   <a:themeElements>
